--- a/courseware/CSCU/Platform/Technical-Track/01-Glossary-Generator-App/Glossary-Generator.pptx
+++ b/courseware/CSCU/Platform/Technical-Track/01-Glossary-Generator-App/Glossary-Generator.pptx
@@ -36,6 +36,8 @@
     <p:sldId id="284" r:id="rId35"/>
     <p:sldId id="285" r:id="rId36"/>
     <p:sldId id="286" r:id="rId37"/>
+    <p:sldId id="287" r:id="rId38"/>
+    <p:sldId id="288" r:id="rId39"/>
   </p:sldIdLst>
   <p:sldSz cx="12191695" cy="6858000" type="screen4x3"/>
   <p:notesSz cx="6858000" cy="9144000"/>
@@ -3245,7 +3247,7 @@
                   <a:srgbClr val="6B7280"/>
                 </a:solidFill>
               </a:rPr>
-              <a:t>Glossary Generator 1.17.0</a:t>
+              <a:t>Glossary Generator 1.17.1</a:t>
             </a:r>
           </a:p>
         </p:txBody>
@@ -7808,7 +7810,7 @@
                 </a:solidFill>
                 <a:latin typeface="Calibri"/>
               </a:rPr>
-              <a:t>— F — POST /jobs/execute/data-discovery profiles object-store files; a folder cascades to its files.</a:t>
+              <a:t>— F — POST /jobs/execute/data-discovery profiles object-store documents.</a:t>
             </a:r>
           </a:p>
           <a:p>
@@ -7953,7 +7955,7 @@
                   <a:srgbClr val="134E4A"/>
                 </a:solidFill>
               </a:rPr>
-              <a:t>Alternative input · Harvest</a:t>
+              <a:t>Lab F · Scope a FOLDER, not a file</a:t>
             </a:r>
           </a:p>
           <a:p>
@@ -7963,7 +7965,7 @@
                   <a:srgbClr val="0F766E"/>
                 </a:solidFill>
               </a:rPr>
-              <a:t>when you cannot scan the source</a:t>
+              <a:t>the cascade is the whole point</a:t>
             </a:r>
           </a:p>
         </p:txBody>
@@ -8046,55 +8048,71 @@
                 </a:solidFill>
                 <a:latin typeface="Calibri"/>
               </a:rPr>
-              <a:t>— Builds the glossary from what PDC already catalogued — no database connection, no password.</a:t>
-            </a:r>
-          </a:p>
-          <a:p>
-            <a:pPr>
-              <a:spcAft>
-                <a:spcPts val="1300"/>
-              </a:spcAft>
-            </a:pPr>
-            <a:r>
-              <a:rPr sz="1600">
-                <a:solidFill>
-                  <a:srgbClr val="1F2A37"/>
-                </a:solidFill>
-                <a:latin typeface="Calibri"/>
-              </a:rPr>
-              <a:t>— There is no list-all-data-sources call: the app discovers roots via entities/filter.</a:t>
-            </a:r>
-          </a:p>
-          <a:p>
-            <a:pPr>
-              <a:spcAft>
-                <a:spcPts val="1300"/>
-              </a:spcAft>
-            </a:pPr>
-            <a:r>
-              <a:rPr sz="1600">
-                <a:solidFill>
-                  <a:srgbClr val="1F2A37"/>
-                </a:solidFill>
-                <a:latin typeface="Calibri"/>
-              </a:rPr>
-              <a:t>— It reads dataType, keys, nullability, the steward's description, sensitivity and existing terms.</a:t>
-            </a:r>
-          </a:p>
-          <a:p>
-            <a:pPr>
-              <a:spcAft>
-                <a:spcPts val="1300"/>
-              </a:spcAft>
-            </a:pPr>
-            <a:r>
-              <a:rPr sz="1600">
-                <a:solidFill>
-                  <a:srgbClr val="1F2A37"/>
-                </a:solidFill>
-                <a:latin typeface="Calibri"/>
-              </a:rPr>
-              <a:t>— Columns PDC already governs are flagged, so the generator suggests but never silently overwrites.</a:t>
+              <a:t>— Scope a FOLDER entity and PDC profiles it AND every file inside. Scope a FILE and you get that file only.</a:t>
+            </a:r>
+          </a:p>
+          <a:p>
+            <a:pPr>
+              <a:spcAft>
+                <a:spcPts val="1300"/>
+              </a:spcAft>
+            </a:pPr>
+            <a:r>
+              <a:rPr sz="1600">
+                <a:solidFill>
+                  <a:srgbClr val="1F2A37"/>
+                </a:solidFill>
+                <a:latin typeface="Calibri"/>
+              </a:rPr>
+              <a:t>— A Data-Elements payload carries ONE representative file per folder — so file scope profiles 5 of 16 and still returns SUCCESS.</a:t>
+            </a:r>
+          </a:p>
+          <a:p>
+            <a:pPr>
+              <a:spcAft>
+                <a:spcPts val="1300"/>
+              </a:spcAft>
+            </a:pPr>
+            <a:r>
+              <a:rPr sz="1600">
+                <a:solidFill>
+                  <a:srgbClr val="1F2A37"/>
+                </a:solidFill>
+                <a:latin typeface="Calibri"/>
+              </a:rPr>
+              <a:t>— Read the run message: 'awc-documents/compliance' (slashed) = folder, cascading. Dotted = the file fallback.</a:t>
+            </a:r>
+          </a:p>
+          <a:p>
+            <a:pPr>
+              <a:spcAft>
+                <a:spcPts val="1300"/>
+              </a:spcAft>
+            </a:pPr>
+            <a:r>
+              <a:rPr sz="1600">
+                <a:solidFill>
+                  <a:srgbClr val="1F2A37"/>
+                </a:solidFill>
+                <a:latin typeface="Calibri"/>
+              </a:rPr>
+              <a:t>— GOTCHA: PDC types object-store folders FOLDER, not DIRECTORY — a scan reports '16 FILE + 5 FOLDER entities'.</a:t>
+            </a:r>
+          </a:p>
+          <a:p>
+            <a:pPr>
+              <a:spcAft>
+                <a:spcPts val="1300"/>
+              </a:spcAft>
+            </a:pPr>
+            <a:r>
+              <a:rPr sz="1600">
+                <a:solidFill>
+                  <a:srgbClr val="1F2A37"/>
+                </a:solidFill>
+                <a:latin typeface="Calibri"/>
+              </a:rPr>
+              <a:t>— A filter that omits FOLDER gets no hits at all, and reads exactly like 'that folder is not catalogued'.</a:t>
             </a:r>
           </a:p>
         </p:txBody>
@@ -8223,7 +8241,7 @@
                   <a:srgbClr val="134E4A"/>
                 </a:solidFill>
               </a:rPr>
-              <a:t>Before you point it at production</a:t>
+              <a:t>Lab F · SKIPPED is not always a failure</a:t>
             </a:r>
           </a:p>
           <a:p>
@@ -8233,7 +8251,7 @@
                   <a:srgbClr val="0F766E"/>
                 </a:solidFill>
               </a:rPr>
-              <a:t>the caveats that bite</a:t>
+              <a:t>what Discovery can and cannot profile</a:t>
             </a:r>
           </a:p>
         </p:txBody>
@@ -8316,71 +8334,71 @@
                 </a:solidFill>
                 <a:latin typeface="Calibri"/>
               </a:rPr>
-              <a:t>— Least privilege — glossary read, entity edit, job execute. Business Steward beats admin.</a:t>
-            </a:r>
-          </a:p>
-          <a:p>
-            <a:pPr>
-              <a:spcAft>
-                <a:spcPts val="1300"/>
-              </a:spcAft>
-            </a:pPr>
-            <a:r>
-              <a:rPr sz="1600">
-                <a:solidFill>
-                  <a:srgbClr val="1F2A37"/>
-                </a:solidFill>
-                <a:latin typeface="Calibri"/>
-              </a:rPr>
-              <a:t>— Confirm the path version against YOUR instance's Swagger; the jobs catalog is richest in v3.</a:t>
-            </a:r>
-          </a:p>
-          <a:p>
-            <a:pPr>
-              <a:spcAft>
-                <a:spcPts val="1300"/>
-              </a:spcAft>
-            </a:pPr>
-            <a:r>
-              <a:rPr sz="1600">
-                <a:solidFill>
-                  <a:srgbClr val="1F2A37"/>
-                </a:solidFill>
-                <a:latin typeface="Calibri"/>
-              </a:rPr>
-              <a:t>— Dry-run proves the merge produces a superset rather than a replacement.</a:t>
-            </a:r>
-          </a:p>
-          <a:p>
-            <a:pPr>
-              <a:spcAft>
-                <a:spcPts val="1300"/>
-              </a:spcAft>
-            </a:pPr>
-            <a:r>
-              <a:rPr sz="1600">
-                <a:solidFill>
-                  <a:srgbClr val="1F2A37"/>
-                </a:solidFill>
-                <a:latin typeface="Calibri"/>
-              </a:rPr>
-              <a:t>— Re-applying is safe — the app merges by term id/name, so links do not duplicate.</a:t>
-            </a:r>
-          </a:p>
-          <a:p>
-            <a:pPr>
-              <a:spcAft>
-                <a:spcPts val="1300"/>
-              </a:spcAft>
-            </a:pPr>
-            <a:r>
-              <a:rPr sz="1600">
-                <a:solidFill>
-                  <a:srgbClr val="1F2A37"/>
-                </a:solidFill>
-                <a:latin typeface="Calibri"/>
-              </a:rPr>
-              <a:t>— Base URL is the server ROOT and the VHOST — not an IP, not the Keycloak realm URL.</a:t>
+              <a:t>— csv / tsv / json / jsonl / txt  -&gt;  COMPLETED: columns with rows, cardinality, uniqueness, density, lengths.</a:t>
+            </a:r>
+          </a:p>
+          <a:p>
+            <a:pPr>
+              <a:spcAft>
+                <a:spcPts val="1300"/>
+              </a:spcAft>
+            </a:pPr>
+            <a:r>
+              <a:rPr sz="1600">
+                <a:solidFill>
+                  <a:srgbClr val="1F2A37"/>
+                </a:solidFill>
+                <a:latin typeface="Calibri"/>
+              </a:rPr>
+              <a:t>— pdf / docx  -&gt;  properties and checksum yes (pages, author, title); Profiled Status stays SKIPPED, permanently.</a:t>
+            </a:r>
+          </a:p>
+          <a:p>
+            <a:pPr>
+              <a:spcAft>
+                <a:spcPts val="1300"/>
+              </a:spcAft>
+            </a:pPr>
+            <a:r>
+              <a:rPr sz="1600">
+                <a:solidFill>
+                  <a:srgbClr val="1F2A37"/>
+                </a:solidFill>
+                <a:latin typeface="Calibri"/>
+              </a:rPr>
+              <a:t>— A PDF has no rows or columns to sample, so profiling is meaningless — neither PDC nor the app can score one.</a:t>
+            </a:r>
+          </a:p>
+          <a:p>
+            <a:pPr>
+              <a:spcAft>
+                <a:spcPts val="1300"/>
+              </a:spcAft>
+            </a:pPr>
+            <a:r>
+              <a:rPr sz="1600">
+                <a:solidFill>
+                  <a:srgbClr val="1F2A37"/>
+                </a:solidFill>
+                <a:latin typeface="Calibri"/>
+              </a:rPr>
+              <a:t>— Verify the cascade on a file that was NOT the representative. The representative only proves the scope;</a:t>
+            </a:r>
+          </a:p>
+          <a:p>
+            <a:pPr>
+              <a:spcAft>
+                <a:spcPts val="1300"/>
+              </a:spcAft>
+            </a:pPr>
+            <a:r>
+              <a:rPr sz="1600">
+                <a:solidFill>
+                  <a:srgbClr val="1F2A37"/>
+                </a:solidFill>
+                <a:latin typeface="Calibri"/>
+              </a:rPr>
+              <a:t>— and a PDF proves neither, because it can never profile.</a:t>
             </a:r>
           </a:p>
         </p:txBody>
@@ -8509,7 +8527,7 @@
                   <a:srgbClr val="134E4A"/>
                 </a:solidFill>
               </a:rPr>
-              <a:t>Drift, Reconcile &amp; the Registry</a:t>
+              <a:t>Alternative input · Harvest</a:t>
             </a:r>
           </a:p>
           <a:p>
@@ -8519,7 +8537,7 @@
                   <a:srgbClr val="0F766E"/>
                 </a:solidFill>
               </a:rPr>
-              <a:t>why drift is a post-reconcile idea</a:t>
+              <a:t>when you cannot scan the source</a:t>
             </a:r>
           </a:p>
         </p:txBody>
@@ -8602,71 +8620,55 @@
                 </a:solidFill>
                 <a:latin typeface="Calibri"/>
               </a:rPr>
-              <a:t>— A dictionary method matches a concept by dictionaryTermId — which does not exist until PDC mints it at import.</a:t>
-            </a:r>
-          </a:p>
-          <a:p>
-            <a:pPr>
-              <a:spcAft>
-                <a:spcPts val="1300"/>
-              </a:spcAft>
-            </a:pPr>
-            <a:r>
-              <a:rPr sz="1600">
-                <a:solidFill>
-                  <a:srgbClr val="1F2A37"/>
-                </a:solidFill>
-                <a:latin typeface="Calibri"/>
-              </a:rPr>
-              <a:t>— scan → review → export → import (ids minted) → RECONCILE → emit methods → drift check.</a:t>
-            </a:r>
-          </a:p>
-          <a:p>
-            <a:pPr>
-              <a:spcAft>
-                <a:spcPts val="1300"/>
-              </a:spcAft>
-            </a:pPr>
-            <a:r>
-              <a:rPr sz="1600">
-                <a:solidFill>
-                  <a:srgbClr val="1F2A37"/>
-                </a:solidFill>
-                <a:latin typeface="Calibri"/>
-              </a:rPr>
-              <a:t>— Before reconcile, dictionary methods read UNKNOWN. Pattern methods bind by category name, so they show a step earlier.</a:t>
-            </a:r>
-          </a:p>
-          <a:p>
-            <a:pPr>
-              <a:spcAft>
-                <a:spcPts val="1300"/>
-              </a:spcAft>
-            </a:pPr>
-            <a:r>
-              <a:rPr sz="1600">
-                <a:solidFill>
-                  <a:srgbClr val="1F2A37"/>
-                </a:solidFill>
-                <a:latin typeface="Calibri"/>
-              </a:rPr>
-              <a:t>— The Registry is persistent state saved with the glossary — the reconcile handshake is stateful.</a:t>
-            </a:r>
-          </a:p>
-          <a:p>
-            <a:pPr>
-              <a:spcAft>
-                <a:spcPts val="1300"/>
-              </a:spcAft>
-            </a:pPr>
-            <a:r>
-              <a:rPr sz="1600">
-                <a:solidFill>
-                  <a:srgbClr val="1F2A37"/>
-                </a:solidFill>
-                <a:latin typeface="Calibri"/>
-              </a:rPr>
-              <a:t>— Sensitivity is rules-first: the model never sets a governed field, and the scan classifier is re-asserted after every run.</a:t>
+              <a:t>— Builds the glossary from what PDC already catalogued — no database connection, no password.</a:t>
+            </a:r>
+          </a:p>
+          <a:p>
+            <a:pPr>
+              <a:spcAft>
+                <a:spcPts val="1300"/>
+              </a:spcAft>
+            </a:pPr>
+            <a:r>
+              <a:rPr sz="1600">
+                <a:solidFill>
+                  <a:srgbClr val="1F2A37"/>
+                </a:solidFill>
+                <a:latin typeface="Calibri"/>
+              </a:rPr>
+              <a:t>— There is no list-all-data-sources call: the app discovers roots via entities/filter.</a:t>
+            </a:r>
+          </a:p>
+          <a:p>
+            <a:pPr>
+              <a:spcAft>
+                <a:spcPts val="1300"/>
+              </a:spcAft>
+            </a:pPr>
+            <a:r>
+              <a:rPr sz="1600">
+                <a:solidFill>
+                  <a:srgbClr val="1F2A37"/>
+                </a:solidFill>
+                <a:latin typeface="Calibri"/>
+              </a:rPr>
+              <a:t>— It reads dataType, keys, nullability, the steward's description, sensitivity and existing terms.</a:t>
+            </a:r>
+          </a:p>
+          <a:p>
+            <a:pPr>
+              <a:spcAft>
+                <a:spcPts val="1300"/>
+              </a:spcAft>
+            </a:pPr>
+            <a:r>
+              <a:rPr sz="1600">
+                <a:solidFill>
+                  <a:srgbClr val="1F2A37"/>
+                </a:solidFill>
+                <a:latin typeface="Calibri"/>
+              </a:rPr>
+              <a:t>— Columns PDC already governs are flagged, so the generator suggests but never silently overwrites.</a:t>
             </a:r>
           </a:p>
         </p:txBody>
@@ -8795,7 +8797,7 @@
                   <a:srgbClr val="134E4A"/>
                 </a:solidFill>
               </a:rPr>
-              <a:t>Safe enrichment</a:t>
+              <a:t>Before you point it at production</a:t>
             </a:r>
           </a:p>
           <a:p>
@@ -8805,7 +8807,7 @@
                   <a:srgbClr val="0F766E"/>
                 </a:solidFill>
               </a:rPr>
-              <a:t>prose from the model, links from a map</a:t>
+              <a:t>the caveats that bite</a:t>
             </a:r>
           </a:p>
         </p:txBody>
@@ -8888,71 +8890,71 @@
                 </a:solidFill>
                 <a:latin typeface="Calibri"/>
               </a:rPr>
-              <a:t>— A small model will invent regulation names, section numbers and — worst — live URLs.</a:t>
-            </a:r>
-          </a:p>
-          <a:p>
-            <a:pPr>
-              <a:spcAft>
-                <a:spcPts val="1300"/>
-              </a:spcAft>
-            </a:pPr>
-            <a:r>
-              <a:rPr sz="1600">
-                <a:solidFill>
-                  <a:srgbClr val="1F2A37"/>
-                </a:solidFill>
-                <a:latin typeface="Calibri"/>
-              </a:rPr>
-              <a:t>— A governance term citing an invented regulation is worse than one citing nothing.</a:t>
-            </a:r>
-          </a:p>
-          <a:p>
-            <a:pPr>
-              <a:spcAft>
-                <a:spcPts val="1300"/>
-              </a:spcAft>
-            </a:pPr>
-            <a:r>
-              <a:rPr sz="1600">
-                <a:solidFill>
-                  <a:srgbClr val="1F2A37"/>
-                </a:solidFill>
-                <a:latin typeface="Calibri"/>
-              </a:rPr>
-              <a:t>— So the model writes one or two plain sentences and is told NOT to produce citations.</a:t>
-            </a:r>
-          </a:p>
-          <a:p>
-            <a:pPr>
-              <a:spcAft>
-                <a:spcPts val="1300"/>
-              </a:spcAft>
-            </a:pPr>
-            <a:r>
-              <a:rPr sz="1600">
-                <a:solidFill>
-                  <a:srgbClr val="1F2A37"/>
-                </a:solidFill>
-                <a:latin typeface="Calibri"/>
-              </a:rPr>
-              <a:t>— Links come only from a curated, human-verified reference map in the domain pack, each stamped with its verification date.</a:t>
-            </a:r>
-          </a:p>
-          <a:p>
-            <a:pPr>
-              <a:spcAft>
-                <a:spcPts val="1300"/>
-              </a:spcAft>
-            </a:pPr>
-            <a:r>
-              <a:rPr sz="1600">
-                <a:solidFill>
-                  <a:srgbClr val="1F2A37"/>
-                </a:solidFill>
-                <a:latin typeface="Calibri"/>
-              </a:rPr>
-              <a:t>— Same principle as the tag allow-list: the model proposes within a controlled vocabulary and never mints facts.</a:t>
+              <a:t>— Least privilege — glossary read, entity edit, job execute. Business Steward beats admin.</a:t>
+            </a:r>
+          </a:p>
+          <a:p>
+            <a:pPr>
+              <a:spcAft>
+                <a:spcPts val="1300"/>
+              </a:spcAft>
+            </a:pPr>
+            <a:r>
+              <a:rPr sz="1600">
+                <a:solidFill>
+                  <a:srgbClr val="1F2A37"/>
+                </a:solidFill>
+                <a:latin typeface="Calibri"/>
+              </a:rPr>
+              <a:t>— Confirm the path version against YOUR instance's Swagger; the jobs catalog is richest in v3.</a:t>
+            </a:r>
+          </a:p>
+          <a:p>
+            <a:pPr>
+              <a:spcAft>
+                <a:spcPts val="1300"/>
+              </a:spcAft>
+            </a:pPr>
+            <a:r>
+              <a:rPr sz="1600">
+                <a:solidFill>
+                  <a:srgbClr val="1F2A37"/>
+                </a:solidFill>
+                <a:latin typeface="Calibri"/>
+              </a:rPr>
+              <a:t>— Dry-run proves the merge produces a superset rather than a replacement.</a:t>
+            </a:r>
+          </a:p>
+          <a:p>
+            <a:pPr>
+              <a:spcAft>
+                <a:spcPts val="1300"/>
+              </a:spcAft>
+            </a:pPr>
+            <a:r>
+              <a:rPr sz="1600">
+                <a:solidFill>
+                  <a:srgbClr val="1F2A37"/>
+                </a:solidFill>
+                <a:latin typeface="Calibri"/>
+              </a:rPr>
+              <a:t>— Re-applying is safe — the app merges by term id/name, so links do not duplicate.</a:t>
+            </a:r>
+          </a:p>
+          <a:p>
+            <a:pPr>
+              <a:spcAft>
+                <a:spcPts val="1300"/>
+              </a:spcAft>
+            </a:pPr>
+            <a:r>
+              <a:rPr sz="1600">
+                <a:solidFill>
+                  <a:srgbClr val="1F2A37"/>
+                </a:solidFill>
+                <a:latin typeface="Calibri"/>
+              </a:rPr>
+              <a:t>— Base URL is the server ROOT and the VHOST — not an IP, not the Keycloak realm URL.</a:t>
             </a:r>
           </a:p>
         </p:txBody>
@@ -9351,7 +9353,7 @@
                   <a:srgbClr val="134E4A"/>
                 </a:solidFill>
               </a:rPr>
-              <a:t>Build from the Term, match the tags</a:t>
+              <a:t>Drift, Reconcile &amp; the Registry</a:t>
             </a:r>
           </a:p>
           <a:p>
@@ -9361,7 +9363,7 @@
                   <a:srgbClr val="0F766E"/>
                 </a:solidFill>
               </a:rPr>
-              <a:t>the closing argument</a:t>
+              <a:t>why drift is a post-reconcile idea</a:t>
             </a:r>
           </a:p>
         </p:txBody>
@@ -9444,55 +9446,71 @@
                 </a:solidFill>
                 <a:latin typeface="Calibri"/>
               </a:rPr>
-              <a:t>— The Term is the canonical anchor: it has identity, links to the glossary, and carries a fixed governed tag set.</a:t>
-            </a:r>
-          </a:p>
-          <a:p>
-            <a:pPr>
-              <a:spcAft>
-                <a:spcPts val="1300"/>
-              </a:spcAft>
-            </a:pPr>
-            <a:r>
-              <a:rPr sz="1600">
-                <a:solidFill>
-                  <a:srgbClr val="1F2A37"/>
-                </a:solidFill>
-                <a:latin typeface="Calibri"/>
-              </a:rPr>
-              <a:t>— Tags are attributes of that term.</a:t>
-            </a:r>
-          </a:p>
-          <a:p>
-            <a:pPr>
-              <a:spcAft>
-                <a:spcPts val="1300"/>
-              </a:spcAft>
-            </a:pPr>
-            <a:r>
-              <a:rPr sz="1600">
-                <a:solidFill>
-                  <a:srgbClr val="1F2A37"/>
-                </a:solidFill>
-                <a:latin typeface="Calibri"/>
-              </a:rPr>
-              <a:t>— So authoring term-first — one method per concept, emitting that concept's tags — guarantees consistency.</a:t>
-            </a:r>
-          </a:p>
-          <a:p>
-            <a:pPr>
-              <a:spcAft>
-                <a:spcPts val="1300"/>
-              </a:spcAft>
-            </a:pPr>
-            <a:r>
-              <a:rPr sz="1600">
-                <a:solidFill>
-                  <a:srgbClr val="1F2A37"/>
-                </a:solidFill>
-                <a:latin typeface="Calibri"/>
-              </a:rPr>
-              <a:t>— Tag consistency is not a competing goal. It is a consequence of term-anchored authoring.</a:t>
+              <a:t>— A dictionary method matches a concept by dictionaryTermId — which does not exist until PDC mints it at import.</a:t>
+            </a:r>
+          </a:p>
+          <a:p>
+            <a:pPr>
+              <a:spcAft>
+                <a:spcPts val="1300"/>
+              </a:spcAft>
+            </a:pPr>
+            <a:r>
+              <a:rPr sz="1600">
+                <a:solidFill>
+                  <a:srgbClr val="1F2A37"/>
+                </a:solidFill>
+                <a:latin typeface="Calibri"/>
+              </a:rPr>
+              <a:t>— scan → review → export → import (ids minted) → RECONCILE → emit methods → drift check.</a:t>
+            </a:r>
+          </a:p>
+          <a:p>
+            <a:pPr>
+              <a:spcAft>
+                <a:spcPts val="1300"/>
+              </a:spcAft>
+            </a:pPr>
+            <a:r>
+              <a:rPr sz="1600">
+                <a:solidFill>
+                  <a:srgbClr val="1F2A37"/>
+                </a:solidFill>
+                <a:latin typeface="Calibri"/>
+              </a:rPr>
+              <a:t>— Before reconcile, dictionary methods read UNKNOWN. Pattern methods bind by category name, so they show a step earlier.</a:t>
+            </a:r>
+          </a:p>
+          <a:p>
+            <a:pPr>
+              <a:spcAft>
+                <a:spcPts val="1300"/>
+              </a:spcAft>
+            </a:pPr>
+            <a:r>
+              <a:rPr sz="1600">
+                <a:solidFill>
+                  <a:srgbClr val="1F2A37"/>
+                </a:solidFill>
+                <a:latin typeface="Calibri"/>
+              </a:rPr>
+              <a:t>— The Registry is persistent state saved with the glossary — the reconcile handshake is stateful.</a:t>
+            </a:r>
+          </a:p>
+          <a:p>
+            <a:pPr>
+              <a:spcAft>
+                <a:spcPts val="1300"/>
+              </a:spcAft>
+            </a:pPr>
+            <a:r>
+              <a:rPr sz="1600">
+                <a:solidFill>
+                  <a:srgbClr val="1F2A37"/>
+                </a:solidFill>
+                <a:latin typeface="Calibri"/>
+              </a:rPr>
+              <a:t>— Sensitivity is rules-first: the model never sets a governed field, and the scan classifier is re-asserted after every run.</a:t>
             </a:r>
           </a:p>
         </p:txBody>
@@ -9558,6 +9576,562 @@
         <p:spPr>
           <a:xfrm>
             <a:off x="0" y="0"/>
+            <a:ext cx="12191695" cy="128016"/>
+          </a:xfrm>
+          <a:prstGeom prst="rect">
+            <a:avLst/>
+          </a:prstGeom>
+          <a:solidFill>
+            <a:srgbClr val="0F766E"/>
+          </a:solidFill>
+          <a:ln>
+            <a:noFill/>
+          </a:ln>
+          <a:effectLst/>
+        </p:spPr>
+        <p:style>
+          <a:lnRef idx="1">
+            <a:schemeClr val="accent1"/>
+          </a:lnRef>
+          <a:fillRef idx="3">
+            <a:schemeClr val="accent1"/>
+          </a:fillRef>
+          <a:effectRef idx="2">
+            <a:schemeClr val="accent1"/>
+          </a:effectRef>
+          <a:fontRef idx="minor">
+            <a:schemeClr val="lt1"/>
+          </a:fontRef>
+        </p:style>
+        <p:txBody>
+          <a:bodyPr rtlCol="0" anchor="ctr"/>
+          <a:lstStyle/>
+          <a:p>
+            <a:pPr algn="ctr"/>
+          </a:p>
+        </p:txBody>
+      </p:sp>
+      <p:sp>
+        <p:nvSpPr>
+          <p:cNvPr id="3" name="TextBox 2"/>
+          <p:cNvSpPr txBox="1"/>
+          <p:nvPr/>
+        </p:nvSpPr>
+        <p:spPr>
+          <a:xfrm>
+            <a:off x="777240" y="502920"/>
+            <a:ext cx="10637215" cy="1005840"/>
+          </a:xfrm>
+          <a:prstGeom prst="rect">
+            <a:avLst/>
+          </a:prstGeom>
+          <a:noFill/>
+        </p:spPr>
+        <p:txBody>
+          <a:bodyPr wrap="square">
+            <a:spAutoFit/>
+          </a:bodyPr>
+          <a:lstStyle/>
+          <a:p>
+            <a:r>
+              <a:rPr sz="3000" b="1">
+                <a:solidFill>
+                  <a:srgbClr val="134E4A"/>
+                </a:solidFill>
+              </a:rPr>
+              <a:t>Safe enrichment</a:t>
+            </a:r>
+          </a:p>
+          <a:p>
+            <a:r>
+              <a:rPr sz="1500" i="1">
+                <a:solidFill>
+                  <a:srgbClr val="0F766E"/>
+                </a:solidFill>
+              </a:rPr>
+              <a:t>prose from the model, links from a map</a:t>
+            </a:r>
+          </a:p>
+        </p:txBody>
+      </p:sp>
+      <p:sp>
+        <p:nvSpPr>
+          <p:cNvPr id="4" name="Rectangle 3"/>
+          <p:cNvSpPr/>
+          <p:nvPr/>
+        </p:nvSpPr>
+        <p:spPr>
+          <a:xfrm>
+            <a:off x="777240" y="1755648"/>
+            <a:ext cx="10637215" cy="15240"/>
+          </a:xfrm>
+          <a:prstGeom prst="rect">
+            <a:avLst/>
+          </a:prstGeom>
+          <a:solidFill>
+            <a:srgbClr val="E5E7EB"/>
+          </a:solidFill>
+          <a:ln>
+            <a:noFill/>
+          </a:ln>
+          <a:effectLst/>
+        </p:spPr>
+        <p:style>
+          <a:lnRef idx="1">
+            <a:schemeClr val="accent1"/>
+          </a:lnRef>
+          <a:fillRef idx="3">
+            <a:schemeClr val="accent1"/>
+          </a:fillRef>
+          <a:effectRef idx="2">
+            <a:schemeClr val="accent1"/>
+          </a:effectRef>
+          <a:fontRef idx="minor">
+            <a:schemeClr val="lt1"/>
+          </a:fontRef>
+        </p:style>
+        <p:txBody>
+          <a:bodyPr rtlCol="0" anchor="ctr"/>
+          <a:lstStyle/>
+          <a:p>
+            <a:pPr algn="ctr"/>
+          </a:p>
+        </p:txBody>
+      </p:sp>
+      <p:sp>
+        <p:nvSpPr>
+          <p:cNvPr id="5" name="TextBox 4"/>
+          <p:cNvSpPr txBox="1"/>
+          <p:nvPr/>
+        </p:nvSpPr>
+        <p:spPr>
+          <a:xfrm>
+            <a:off x="777240" y="1965960"/>
+            <a:ext cx="10637215" cy="4206240"/>
+          </a:xfrm>
+          <a:prstGeom prst="rect">
+            <a:avLst/>
+          </a:prstGeom>
+          <a:noFill/>
+        </p:spPr>
+        <p:txBody>
+          <a:bodyPr wrap="square">
+            <a:spAutoFit/>
+          </a:bodyPr>
+          <a:lstStyle/>
+          <a:p>
+            <a:pPr>
+              <a:spcAft>
+                <a:spcPts val="1300"/>
+              </a:spcAft>
+            </a:pPr>
+            <a:r>
+              <a:rPr sz="1600">
+                <a:solidFill>
+                  <a:srgbClr val="1F2A37"/>
+                </a:solidFill>
+                <a:latin typeface="Calibri"/>
+              </a:rPr>
+              <a:t>— A small model will invent regulation names, section numbers and — worst — live URLs.</a:t>
+            </a:r>
+          </a:p>
+          <a:p>
+            <a:pPr>
+              <a:spcAft>
+                <a:spcPts val="1300"/>
+              </a:spcAft>
+            </a:pPr>
+            <a:r>
+              <a:rPr sz="1600">
+                <a:solidFill>
+                  <a:srgbClr val="1F2A37"/>
+                </a:solidFill>
+                <a:latin typeface="Calibri"/>
+              </a:rPr>
+              <a:t>— A governance term citing an invented regulation is worse than one citing nothing.</a:t>
+            </a:r>
+          </a:p>
+          <a:p>
+            <a:pPr>
+              <a:spcAft>
+                <a:spcPts val="1300"/>
+              </a:spcAft>
+            </a:pPr>
+            <a:r>
+              <a:rPr sz="1600">
+                <a:solidFill>
+                  <a:srgbClr val="1F2A37"/>
+                </a:solidFill>
+                <a:latin typeface="Calibri"/>
+              </a:rPr>
+              <a:t>— So the model writes one or two plain sentences and is told NOT to produce citations.</a:t>
+            </a:r>
+          </a:p>
+          <a:p>
+            <a:pPr>
+              <a:spcAft>
+                <a:spcPts val="1300"/>
+              </a:spcAft>
+            </a:pPr>
+            <a:r>
+              <a:rPr sz="1600">
+                <a:solidFill>
+                  <a:srgbClr val="1F2A37"/>
+                </a:solidFill>
+                <a:latin typeface="Calibri"/>
+              </a:rPr>
+              <a:t>— Links come only from a curated, human-verified reference map in the domain pack, each stamped with its verification date.</a:t>
+            </a:r>
+          </a:p>
+          <a:p>
+            <a:pPr>
+              <a:spcAft>
+                <a:spcPts val="1300"/>
+              </a:spcAft>
+            </a:pPr>
+            <a:r>
+              <a:rPr sz="1600">
+                <a:solidFill>
+                  <a:srgbClr val="1F2A37"/>
+                </a:solidFill>
+                <a:latin typeface="Calibri"/>
+              </a:rPr>
+              <a:t>— Same principle as the tag allow-list: the model proposes within a controlled vocabulary and never mints facts.</a:t>
+            </a:r>
+          </a:p>
+        </p:txBody>
+      </p:sp>
+      <p:sp>
+        <p:nvSpPr>
+          <p:cNvPr id="6" name="TextBox 5"/>
+          <p:cNvSpPr txBox="1"/>
+          <p:nvPr/>
+        </p:nvSpPr>
+        <p:spPr>
+          <a:xfrm>
+            <a:off x="11002975" y="6291072"/>
+            <a:ext cx="731520" cy="320040"/>
+          </a:xfrm>
+          <a:prstGeom prst="rect">
+            <a:avLst/>
+          </a:prstGeom>
+          <a:noFill/>
+        </p:spPr>
+        <p:txBody>
+          <a:bodyPr wrap="square">
+            <a:spAutoFit/>
+          </a:bodyPr>
+          <a:lstStyle/>
+          <a:p>
+            <a:pPr algn="r"/>
+            <a:r>
+              <a:rPr sz="1100">
+                <a:solidFill>
+                  <a:srgbClr val="6B7280"/>
+                </a:solidFill>
+              </a:rPr>
+              <a:t>31</a:t>
+            </a:r>
+          </a:p>
+        </p:txBody>
+      </p:sp>
+    </p:spTree>
+  </p:cSld>
+  <p:clrMapOvr>
+    <a:masterClrMapping/>
+  </p:clrMapOvr>
+</p:sld>
+</file>
+
+<file path=ppt/slides/slide32.xml><?xml version="1.0" encoding="utf-8"?>
+<p:sld xmlns:a="http://schemas.openxmlformats.org/drawingml/2006/main" xmlns:p="http://schemas.openxmlformats.org/presentationml/2006/main" xmlns:r="http://schemas.openxmlformats.org/officeDocument/2006/relationships">
+  <p:cSld>
+    <p:spTree>
+      <p:nvGrpSpPr>
+        <p:cNvPr id="1" name=""/>
+        <p:cNvGrpSpPr/>
+        <p:nvPr/>
+      </p:nvGrpSpPr>
+      <p:grpSpPr/>
+      <p:sp>
+        <p:nvSpPr>
+          <p:cNvPr id="2" name="Rectangle 1"/>
+          <p:cNvSpPr/>
+          <p:nvPr/>
+        </p:nvSpPr>
+        <p:spPr>
+          <a:xfrm>
+            <a:off x="0" y="0"/>
+            <a:ext cx="12191695" cy="128016"/>
+          </a:xfrm>
+          <a:prstGeom prst="rect">
+            <a:avLst/>
+          </a:prstGeom>
+          <a:solidFill>
+            <a:srgbClr val="0F766E"/>
+          </a:solidFill>
+          <a:ln>
+            <a:noFill/>
+          </a:ln>
+          <a:effectLst/>
+        </p:spPr>
+        <p:style>
+          <a:lnRef idx="1">
+            <a:schemeClr val="accent1"/>
+          </a:lnRef>
+          <a:fillRef idx="3">
+            <a:schemeClr val="accent1"/>
+          </a:fillRef>
+          <a:effectRef idx="2">
+            <a:schemeClr val="accent1"/>
+          </a:effectRef>
+          <a:fontRef idx="minor">
+            <a:schemeClr val="lt1"/>
+          </a:fontRef>
+        </p:style>
+        <p:txBody>
+          <a:bodyPr rtlCol="0" anchor="ctr"/>
+          <a:lstStyle/>
+          <a:p>
+            <a:pPr algn="ctr"/>
+          </a:p>
+        </p:txBody>
+      </p:sp>
+      <p:sp>
+        <p:nvSpPr>
+          <p:cNvPr id="3" name="TextBox 2"/>
+          <p:cNvSpPr txBox="1"/>
+          <p:nvPr/>
+        </p:nvSpPr>
+        <p:spPr>
+          <a:xfrm>
+            <a:off x="777240" y="502920"/>
+            <a:ext cx="10637215" cy="1005840"/>
+          </a:xfrm>
+          <a:prstGeom prst="rect">
+            <a:avLst/>
+          </a:prstGeom>
+          <a:noFill/>
+        </p:spPr>
+        <p:txBody>
+          <a:bodyPr wrap="square">
+            <a:spAutoFit/>
+          </a:bodyPr>
+          <a:lstStyle/>
+          <a:p>
+            <a:r>
+              <a:rPr sz="3000" b="1">
+                <a:solidFill>
+                  <a:srgbClr val="134E4A"/>
+                </a:solidFill>
+              </a:rPr>
+              <a:t>Build from the Term, match the tags</a:t>
+            </a:r>
+          </a:p>
+          <a:p>
+            <a:r>
+              <a:rPr sz="1500" i="1">
+                <a:solidFill>
+                  <a:srgbClr val="0F766E"/>
+                </a:solidFill>
+              </a:rPr>
+              <a:t>the closing argument</a:t>
+            </a:r>
+          </a:p>
+        </p:txBody>
+      </p:sp>
+      <p:sp>
+        <p:nvSpPr>
+          <p:cNvPr id="4" name="Rectangle 3"/>
+          <p:cNvSpPr/>
+          <p:nvPr/>
+        </p:nvSpPr>
+        <p:spPr>
+          <a:xfrm>
+            <a:off x="777240" y="1755648"/>
+            <a:ext cx="10637215" cy="15240"/>
+          </a:xfrm>
+          <a:prstGeom prst="rect">
+            <a:avLst/>
+          </a:prstGeom>
+          <a:solidFill>
+            <a:srgbClr val="E5E7EB"/>
+          </a:solidFill>
+          <a:ln>
+            <a:noFill/>
+          </a:ln>
+          <a:effectLst/>
+        </p:spPr>
+        <p:style>
+          <a:lnRef idx="1">
+            <a:schemeClr val="accent1"/>
+          </a:lnRef>
+          <a:fillRef idx="3">
+            <a:schemeClr val="accent1"/>
+          </a:fillRef>
+          <a:effectRef idx="2">
+            <a:schemeClr val="accent1"/>
+          </a:effectRef>
+          <a:fontRef idx="minor">
+            <a:schemeClr val="lt1"/>
+          </a:fontRef>
+        </p:style>
+        <p:txBody>
+          <a:bodyPr rtlCol="0" anchor="ctr"/>
+          <a:lstStyle/>
+          <a:p>
+            <a:pPr algn="ctr"/>
+          </a:p>
+        </p:txBody>
+      </p:sp>
+      <p:sp>
+        <p:nvSpPr>
+          <p:cNvPr id="5" name="TextBox 4"/>
+          <p:cNvSpPr txBox="1"/>
+          <p:nvPr/>
+        </p:nvSpPr>
+        <p:spPr>
+          <a:xfrm>
+            <a:off x="777240" y="1965960"/>
+            <a:ext cx="10637215" cy="4206240"/>
+          </a:xfrm>
+          <a:prstGeom prst="rect">
+            <a:avLst/>
+          </a:prstGeom>
+          <a:noFill/>
+        </p:spPr>
+        <p:txBody>
+          <a:bodyPr wrap="square">
+            <a:spAutoFit/>
+          </a:bodyPr>
+          <a:lstStyle/>
+          <a:p>
+            <a:pPr>
+              <a:spcAft>
+                <a:spcPts val="1300"/>
+              </a:spcAft>
+            </a:pPr>
+            <a:r>
+              <a:rPr sz="1600">
+                <a:solidFill>
+                  <a:srgbClr val="1F2A37"/>
+                </a:solidFill>
+                <a:latin typeface="Calibri"/>
+              </a:rPr>
+              <a:t>— The Term is the canonical anchor: it has identity, links to the glossary, and carries a fixed governed tag set.</a:t>
+            </a:r>
+          </a:p>
+          <a:p>
+            <a:pPr>
+              <a:spcAft>
+                <a:spcPts val="1300"/>
+              </a:spcAft>
+            </a:pPr>
+            <a:r>
+              <a:rPr sz="1600">
+                <a:solidFill>
+                  <a:srgbClr val="1F2A37"/>
+                </a:solidFill>
+                <a:latin typeface="Calibri"/>
+              </a:rPr>
+              <a:t>— Tags are attributes of that term.</a:t>
+            </a:r>
+          </a:p>
+          <a:p>
+            <a:pPr>
+              <a:spcAft>
+                <a:spcPts val="1300"/>
+              </a:spcAft>
+            </a:pPr>
+            <a:r>
+              <a:rPr sz="1600">
+                <a:solidFill>
+                  <a:srgbClr val="1F2A37"/>
+                </a:solidFill>
+                <a:latin typeface="Calibri"/>
+              </a:rPr>
+              <a:t>— So authoring term-first — one method per concept, emitting that concept's tags — guarantees consistency.</a:t>
+            </a:r>
+          </a:p>
+          <a:p>
+            <a:pPr>
+              <a:spcAft>
+                <a:spcPts val="1300"/>
+              </a:spcAft>
+            </a:pPr>
+            <a:r>
+              <a:rPr sz="1600">
+                <a:solidFill>
+                  <a:srgbClr val="1F2A37"/>
+                </a:solidFill>
+                <a:latin typeface="Calibri"/>
+              </a:rPr>
+              <a:t>— Tag consistency is not a competing goal. It is a consequence of term-anchored authoring.</a:t>
+            </a:r>
+          </a:p>
+        </p:txBody>
+      </p:sp>
+      <p:sp>
+        <p:nvSpPr>
+          <p:cNvPr id="6" name="TextBox 5"/>
+          <p:cNvSpPr txBox="1"/>
+          <p:nvPr/>
+        </p:nvSpPr>
+        <p:spPr>
+          <a:xfrm>
+            <a:off x="11002975" y="6291072"/>
+            <a:ext cx="731520" cy="320040"/>
+          </a:xfrm>
+          <a:prstGeom prst="rect">
+            <a:avLst/>
+          </a:prstGeom>
+          <a:noFill/>
+        </p:spPr>
+        <p:txBody>
+          <a:bodyPr wrap="square">
+            <a:spAutoFit/>
+          </a:bodyPr>
+          <a:lstStyle/>
+          <a:p>
+            <a:pPr algn="r"/>
+            <a:r>
+              <a:rPr sz="1100">
+                <a:solidFill>
+                  <a:srgbClr val="6B7280"/>
+                </a:solidFill>
+              </a:rPr>
+              <a:t>32</a:t>
+            </a:r>
+          </a:p>
+        </p:txBody>
+      </p:sp>
+    </p:spTree>
+  </p:cSld>
+  <p:clrMapOvr>
+    <a:masterClrMapping/>
+  </p:clrMapOvr>
+</p:sld>
+</file>
+
+<file path=ppt/slides/slide33.xml><?xml version="1.0" encoding="utf-8"?>
+<p:sld xmlns:a="http://schemas.openxmlformats.org/drawingml/2006/main" xmlns:p="http://schemas.openxmlformats.org/presentationml/2006/main" xmlns:r="http://schemas.openxmlformats.org/officeDocument/2006/relationships">
+  <p:cSld>
+    <p:spTree>
+      <p:nvGrpSpPr>
+        <p:cNvPr id="1" name=""/>
+        <p:cNvGrpSpPr/>
+        <p:nvPr/>
+      </p:nvGrpSpPr>
+      <p:grpSpPr/>
+      <p:sp>
+        <p:nvSpPr>
+          <p:cNvPr id="2" name="Rectangle 1"/>
+          <p:cNvSpPr/>
+          <p:nvPr/>
+        </p:nvSpPr>
+        <p:spPr>
+          <a:xfrm>
+            <a:off x="0" y="0"/>
             <a:ext cx="12191695" cy="6858000"/>
           </a:xfrm>
           <a:prstGeom prst="rect">
@@ -9661,7 +10235,7 @@
                   <a:srgbClr val="6B7280"/>
                 </a:solidFill>
               </a:rPr>
-              <a:t>Glossary Generator 1.17.0</a:t>
+              <a:t>Glossary Generator 1.17.1</a:t>
             </a:r>
           </a:p>
         </p:txBody>

--- a/courseware/CSCU/Platform/Technical-Track/01-Glossary-Generator-App/Glossary-Generator.pptx
+++ b/courseware/CSCU/Platform/Technical-Track/01-Glossary-Generator-App/Glossary-Generator.pptx
@@ -38,6 +38,9 @@
     <p:sldId id="286" r:id="rId37"/>
     <p:sldId id="287" r:id="rId38"/>
     <p:sldId id="288" r:id="rId39"/>
+    <p:sldId id="289" r:id="rId40"/>
+    <p:sldId id="290" r:id="rId41"/>
+    <p:sldId id="291" r:id="rId42"/>
   </p:sldIdLst>
   <p:sldSz cx="12191695" cy="6858000" type="screen4x3"/>
   <p:notesSz cx="6858000" cy="9144000"/>
@@ -3247,7 +3250,7 @@
                   <a:srgbClr val="6B7280"/>
                 </a:solidFill>
               </a:rPr>
-              <a:t>Glossary Generator 1.17.1</a:t>
+              <a:t>Glossary Generator 1.24.0</a:t>
             </a:r>
           </a:p>
         </p:txBody>
@@ -5070,7 +5073,7 @@
                   <a:srgbClr val="134E4A"/>
                 </a:solidFill>
               </a:rPr>
-              <a:t>The Term &amp; Tag Dictionary</a:t>
+              <a:t>What counts as evidence of one concept</a:t>
             </a:r>
           </a:p>
           <a:p>
@@ -5080,7 +5083,7 @@
                   <a:srgbClr val="0F766E"/>
                 </a:solidFill>
               </a:rPr>
-              <a:t>one governed vocabulary</a:t>
+              <a:t>the advisor's ranking, strongest first</a:t>
             </a:r>
           </a:p>
         </p:txBody>
@@ -5163,71 +5166,71 @@
                 </a:solidFill>
                 <a:latin typeface="Calibri"/>
               </a:rPr>
-              <a:t>— A generic baseline (protected) plus a company layer seeded from the domain pack and grown from scans.</a:t>
-            </a:r>
-          </a:p>
-          <a:p>
-            <a:pPr>
-              <a:spcAft>
-                <a:spcPts val="1300"/>
-              </a:spcAft>
-            </a:pPr>
-            <a:r>
-              <a:rPr sz="1600">
-                <a:solidFill>
-                  <a:srgbClr val="1F2A37"/>
-                </a:solidFill>
-                <a:latin typeface="Calibri"/>
-              </a:rPr>
-              <a:t>— Scan-grown vocabulary lands in PENDING and governs nothing until a steward approves it.</a:t>
-            </a:r>
-          </a:p>
-          <a:p>
-            <a:pPr>
-              <a:spcAft>
-                <a:spcPts val="1300"/>
-              </a:spcAft>
-            </a:pPr>
-            <a:r>
-              <a:rPr sz="1600">
-                <a:solidFill>
-                  <a:srgbClr val="1F2A37"/>
-                </a:solidFill>
-                <a:latin typeface="Calibri"/>
-              </a:rPr>
-              <a:t>— It is embedded in the Registry at export — so the Policy Generator can only use the same allow-list.</a:t>
-            </a:r>
-          </a:p>
-          <a:p>
-            <a:pPr>
-              <a:spcAft>
-                <a:spcPts val="1300"/>
-              </a:spcAft>
-            </a:pPr>
-            <a:r>
-              <a:rPr sz="1600">
-                <a:solidFill>
-                  <a:srgbClr val="1F2A37"/>
-                </a:solidFill>
-                <a:latin typeface="Calibri"/>
-              </a:rPr>
-              <a:t>— That is the tag-consistency contract between the two apps.</a:t>
-            </a:r>
-          </a:p>
-          <a:p>
-            <a:pPr>
-              <a:spcAft>
-                <a:spcPts val="1300"/>
-              </a:spcAft>
-            </a:pPr>
-            <a:r>
-              <a:rPr sz="1600">
-                <a:solidFill>
-                  <a:srgbClr val="1F2A37"/>
-                </a:solidFill>
-                <a:latin typeface="Calibri"/>
-              </a:rPr>
-              <a:t>— Sensitivity is ORDINAL: tags and canonical terms can only raise a classification, never lower it.</a:t>
+              <a:t>— FK link between the columns  -&gt;  same, by construction.</a:t>
+            </a:r>
+          </a:p>
+          <a:p>
+            <a:pPr>
+              <a:spcAft>
+                <a:spcPts val="1300"/>
+              </a:spcAft>
+            </a:pPr>
+            <a:r>
+              <a:rPr sz="1600">
+                <a:solidFill>
+                  <a:srgbClr val="1F2A37"/>
+                </a:solidFill>
+                <a:latin typeface="Calibri"/>
+              </a:rPr>
+              <a:t>— Overlapping CODED value sets {OPEN, CLOSED}  -&gt;  same. Disjoint code lists  -&gt;  different.</a:t>
+            </a:r>
+          </a:p>
+          <a:p>
+            <a:pPr>
+              <a:spcAft>
+                <a:spcPts val="1300"/>
+              </a:spcAft>
+            </a:pPr>
+            <a:r>
+              <a:rPr sz="1600">
+                <a:solidFill>
+                  <a:srgbClr val="1F2A37"/>
+                </a:solidFill>
+                <a:latin typeface="Calibri"/>
+              </a:rPr>
+              <a:t>— Identical DISTINCTIVE format ^AWC-[A-Z]{2}-\d{6}$  -&gt;  same. Different formats  -&gt;  different.</a:t>
+            </a:r>
+          </a:p>
+          <a:p>
+            <a:pPr>
+              <a:spcAft>
+                <a:spcPts val="1300"/>
+              </a:spcAft>
+            </a:pPr>
+            <a:r>
+              <a:rPr sz="1600">
+                <a:solidFill>
+                  <a:srgbClr val="1F2A37"/>
+                </a:solidFill>
+                <a:latin typeface="Calibri"/>
+              </a:rPr>
+              <a:t>— PII class mismatch  -&gt;  different. The weakest signal, used last.</a:t>
+            </a:r>
+          </a:p>
+          <a:p>
+            <a:pPr>
+              <a:spcAft>
+                <a:spcPts val="1300"/>
+              </a:spcAft>
+            </a:pPr>
+            <a:r>
+              <a:rPr sz="1600">
+                <a:solidFill>
+                  <a:srgbClr val="1F2A37"/>
+                </a:solidFill>
+                <a:latin typeface="Calibri"/>
+              </a:rPr>
+              <a:t>— Two of these are sound in ONE direction only — see the next slide.</a:t>
             </a:r>
           </a:p>
         </p:txBody>
@@ -5356,7 +5359,7 @@
                   <a:srgbClr val="134E4A"/>
                 </a:solidFill>
               </a:rPr>
-              <a:t>Step 3 · Govern and generate</a:t>
+              <a:t>A data TYPE is not a CONCEPT</a:t>
             </a:r>
           </a:p>
           <a:p>
@@ -5366,7 +5369,7 @@
                   <a:srgbClr val="0F766E"/>
                 </a:solidFill>
               </a:rPr>
-              <a:t>stewardship baked in</a:t>
+              <a:t>the trap that bit this app twice</a:t>
             </a:r>
           </a:p>
         </p:txBody>
@@ -5449,71 +5452,71 @@
                 </a:solidFill>
                 <a:latin typeface="Calibri"/>
               </a:rPr>
-              <a:t>— Build the roster by hand or fetch it live from Keycloak, so accounts match the target instance.</a:t>
-            </a:r>
-          </a:p>
-          <a:p>
-            <a:pPr>
-              <a:spcAft>
-                <a:spcPts val="1300"/>
-              </a:spcAft>
-            </a:pPr>
-            <a:r>
-              <a:rPr sz="1600">
-                <a:solidFill>
-                  <a:srgbClr val="1F2A37"/>
-                </a:solidFill>
-                <a:latin typeface="Calibri"/>
-              </a:rPr>
-              <a:t>— Set steward / owner / custodian / status / rating — globally or per category.</a:t>
-            </a:r>
-          </a:p>
-          <a:p>
-            <a:pPr>
-              <a:spcAft>
-                <a:spcPts val="1300"/>
-              </a:spcAft>
-            </a:pPr>
-            <a:r>
-              <a:rPr sz="1600">
-                <a:solidFill>
-                  <a:srgbClr val="1F2A37"/>
-                </a:solidFill>
-                <a:latin typeface="Calibri"/>
-              </a:rPr>
-              <a:t>— People and terms bind by per-instance UUID, never display name.</a:t>
-            </a:r>
-          </a:p>
-          <a:p>
-            <a:pPr>
-              <a:spcAft>
-                <a:spcPts val="1300"/>
-              </a:spcAft>
-            </a:pPr>
-            <a:r>
-              <a:rPr sz="1600">
-                <a:solidFill>
-                  <a:srgbClr val="1F2A37"/>
-                </a:solidFill>
-                <a:latin typeface="Calibri"/>
-              </a:rPr>
-              <a:t>— Generate writes the JSONL and the Registry. Import replaces the WHOLE glossary, not a delta.</a:t>
-            </a:r>
-          </a:p>
-          <a:p>
-            <a:pPr>
-              <a:spcAft>
-                <a:spcPts val="1300"/>
-              </a:spcAft>
-            </a:pPr>
-            <a:r>
-              <a:rPr sz="1600">
-                <a:solidFill>
-                  <a:srgbClr val="1F2A37"/>
-                </a:solidFill>
-                <a:latin typeface="Calibri"/>
-              </a:rPr>
-              <a:t>— Draft policies (AI) also emits Quality/ DQ rules: format, allowed_values, not_null, unique, valid_date, numeric.</a:t>
+              <a:t>— ^0\.\d{2}$ means 'a small decimal' — lead_ppb, copper_ppm and turbidity_ntu ALL match it.</a:t>
+            </a:r>
+          </a:p>
+          <a:p>
+            <a:pPr>
+              <a:spcAft>
+                <a:spcPts val="1300"/>
+              </a:spcAft>
+            </a:pPr>
+            <a:r>
+              <a:rPr sz="1600">
+                <a:solidFill>
+                  <a:srgbClr val="1F2A37"/>
+                </a:solidFill>
+                <a:latin typeface="Calibri"/>
+              </a:rPr>
+              <a:t>— Scored as 'same concept' it ranked Lead Ppb &lt;- Turbidity Ntu at 0.85 STRONG. Merging = one contaminant's limits on another's term.</a:t>
+            </a:r>
+          </a:p>
+          <a:p>
+            <a:pPr>
+              <a:spcAft>
+                <a:spcPts val="1300"/>
+              </a:spcAft>
+            </a:pPr>
+            <a:r>
+              <a:rPr sz="1600">
+                <a:solidFill>
+                  <a:srgbClr val="1F2A37"/>
+                </a:solidFill>
+                <a:latin typeface="Calibri"/>
+              </a:rPr>
+              <a:t>— Same with overlap: Paid Bills and Outstanding Bills both draw from {0,1}, scored 100% overlap — and are OPPOSITES.</a:t>
+            </a:r>
+          </a:p>
+          <a:p>
+            <a:pPr>
+              <a:spcAft>
+                <a:spcPts val="1300"/>
+              </a:spcAft>
+            </a:pPr>
+            <a:r>
+              <a:rPr sz="1600">
+                <a:solidFill>
+                  <a:srgbClr val="1F2A37"/>
+                </a:solidFill>
+                <a:latin typeface="Calibri"/>
+              </a:rPr>
+              <a:t>— Now gated: a format counts only if DISTINCTIVE (minted literal text, not digit classes); overlap only for a CODED vocabulary.</a:t>
+            </a:r>
+          </a:p>
+          <a:p>
+            <a:pPr>
+              <a:spcAft>
+                <a:spcPts val="1300"/>
+              </a:spcAft>
+            </a:pPr>
+            <a:r>
+              <a:rPr sz="1600">
+                <a:solidFill>
+                  <a:srgbClr val="1F2A37"/>
+                </a:solidFill>
+                <a:latin typeface="Calibri"/>
+              </a:rPr>
+              <a:t>— Otherwise: no verdict, 'too generic to identify a concept — compare the definitions'. The steward decides.</a:t>
             </a:r>
           </a:p>
         </p:txBody>
@@ -5579,7 +5582,7 @@
         <p:spPr>
           <a:xfrm>
             <a:off x="0" y="0"/>
-            <a:ext cx="12191695" cy="6858000"/>
+            <a:ext cx="12191695" cy="128016"/>
           </a:xfrm>
           <a:prstGeom prst="rect">
             <a:avLst/>
@@ -5622,8 +5625,8 @@
         </p:nvSpPr>
         <p:spPr>
           <a:xfrm>
-            <a:off x="914400" y="2194560"/>
-            <a:ext cx="10362895" cy="2377440"/>
+            <a:off x="777240" y="502920"/>
+            <a:ext cx="10637215" cy="1005840"/>
           </a:xfrm>
           <a:prstGeom prst="rect">
             <a:avLst/>
@@ -5637,22 +5640,203 @@
           <a:lstStyle/>
           <a:p>
             <a:r>
-              <a:rPr sz="4000" b="1">
-                <a:solidFill>
-                  <a:srgbClr val="FFFFFF"/>
-                </a:solidFill>
-              </a:rPr>
-              <a:t>Part 2</a:t>
-            </a:r>
-          </a:p>
-          <a:p>
-            <a:r>
-              <a:rPr sz="2400">
-                <a:solidFill>
-                  <a:srgbClr val="FFFFFF"/>
-                </a:solidFill>
-              </a:rPr>
-              <a:t>The PDC Public API</a:t>
+              <a:rPr sz="3000" b="1">
+                <a:solidFill>
+                  <a:srgbClr val="134E4A"/>
+                </a:solidFill>
+              </a:rPr>
+              <a:t>Read the ranking, not the scores</a:t>
+            </a:r>
+          </a:p>
+          <a:p>
+            <a:r>
+              <a:rPr sz="1500" i="1">
+                <a:solidFill>
+                  <a:srgbClr val="0F766E"/>
+                </a:solidFill>
+              </a:rPr>
+              <a:t>how the flaw showed itself</a:t>
+            </a:r>
+          </a:p>
+        </p:txBody>
+      </p:sp>
+      <p:sp>
+        <p:nvSpPr>
+          <p:cNvPr id="4" name="Rectangle 3"/>
+          <p:cNvSpPr/>
+          <p:nvPr/>
+        </p:nvSpPr>
+        <p:spPr>
+          <a:xfrm>
+            <a:off x="777240" y="1755648"/>
+            <a:ext cx="10637215" cy="15240"/>
+          </a:xfrm>
+          <a:prstGeom prst="rect">
+            <a:avLst/>
+          </a:prstGeom>
+          <a:solidFill>
+            <a:srgbClr val="E5E7EB"/>
+          </a:solidFill>
+          <a:ln>
+            <a:noFill/>
+          </a:ln>
+          <a:effectLst/>
+        </p:spPr>
+        <p:style>
+          <a:lnRef idx="1">
+            <a:schemeClr val="accent1"/>
+          </a:lnRef>
+          <a:fillRef idx="3">
+            <a:schemeClr val="accent1"/>
+          </a:fillRef>
+          <a:effectRef idx="2">
+            <a:schemeClr val="accent1"/>
+          </a:effectRef>
+          <a:fontRef idx="minor">
+            <a:schemeClr val="lt1"/>
+          </a:fontRef>
+        </p:style>
+        <p:txBody>
+          <a:bodyPr rtlCol="0" anchor="ctr"/>
+          <a:lstStyle/>
+          <a:p>
+            <a:pPr algn="ctr"/>
+          </a:p>
+        </p:txBody>
+      </p:sp>
+      <p:sp>
+        <p:nvSpPr>
+          <p:cNvPr id="5" name="TextBox 4"/>
+          <p:cNvSpPr txBox="1"/>
+          <p:nvPr/>
+        </p:nvSpPr>
+        <p:spPr>
+          <a:xfrm>
+            <a:off x="777240" y="1965960"/>
+            <a:ext cx="10637215" cy="4206240"/>
+          </a:xfrm>
+          <a:prstGeom prst="rect">
+            <a:avLst/>
+          </a:prstGeom>
+          <a:noFill/>
+        </p:spPr>
+        <p:txBody>
+          <a:bodyPr wrap="square">
+            <a:spAutoFit/>
+          </a:bodyPr>
+          <a:lstStyle/>
+          <a:p>
+            <a:pPr>
+              <a:spcAft>
+                <a:spcPts val="1300"/>
+              </a:spcAft>
+            </a:pPr>
+            <a:r>
+              <a:rPr sz="1600">
+                <a:solidFill>
+                  <a:srgbClr val="1F2A37"/>
+                </a:solidFill>
+                <a:latin typeface="Calibri"/>
+              </a:rPr>
+              <a:t>— The tell that scoring measures the wrong thing: a CORRECT answer ranking below wrong ones.</a:t>
+            </a:r>
+          </a:p>
+          <a:p>
+            <a:pPr>
+              <a:spcAft>
+                <a:spcPts val="1300"/>
+              </a:spcAft>
+            </a:pPr>
+            <a:r>
+              <a:rPr sz="1600">
+                <a:solidFill>
+                  <a:srgbClr val="1F2A37"/>
+                </a:solidFill>
+                <a:latin typeface="Calibri"/>
+              </a:rPr>
+              <a:t>— Chlorine Residual &lt;- Chlorine Residual Ppm — the one right merge — scored 0.84 review.</a:t>
+            </a:r>
+          </a:p>
+          <a:p>
+            <a:pPr>
+              <a:spcAft>
+                <a:spcPts val="1300"/>
+              </a:spcAft>
+            </a:pPr>
+            <a:r>
+              <a:rPr sz="1600">
+                <a:solidFill>
+                  <a:srgbClr val="1F2A37"/>
+                </a:solidFill>
+                <a:latin typeface="Calibri"/>
+              </a:rPr>
+              <a:t>— Three false positives scored 0.85 strong above it, because name identity was outranked by format identity.</a:t>
+            </a:r>
+          </a:p>
+          <a:p>
+            <a:pPr>
+              <a:spcAft>
+                <a:spcPts val="1300"/>
+              </a:spcAft>
+            </a:pPr>
+            <a:r>
+              <a:rPr sz="1600">
+                <a:solidFill>
+                  <a:srgbClr val="1F2A37"/>
+                </a:solidFill>
+                <a:latin typeface="Calibri"/>
+              </a:rPr>
+              <a:t>— Find similar is not the duplicate resolver: the resolver groups IDENTICAL names, Find similar spans DIFFERENT ones.</a:t>
+            </a:r>
+          </a:p>
+          <a:p>
+            <a:pPr>
+              <a:spcAft>
+                <a:spcPts val="1300"/>
+              </a:spcAft>
+            </a:pPr>
+            <a:r>
+              <a:rPr sz="1600">
+                <a:solidFill>
+                  <a:srgbClr val="1F2A37"/>
+                </a:solidFill>
+                <a:latin typeface="Calibri"/>
+              </a:rPr>
+              <a:t>— Merging in Find similar RENAMES one term, which then forms a same-name group for the resolver to fold. Two steps by design.</a:t>
+            </a:r>
+          </a:p>
+        </p:txBody>
+      </p:sp>
+      <p:sp>
+        <p:nvSpPr>
+          <p:cNvPr id="6" name="TextBox 5"/>
+          <p:cNvSpPr txBox="1"/>
+          <p:nvPr/>
+        </p:nvSpPr>
+        <p:spPr>
+          <a:xfrm>
+            <a:off x="11002975" y="6291072"/>
+            <a:ext cx="731520" cy="320040"/>
+          </a:xfrm>
+          <a:prstGeom prst="rect">
+            <a:avLst/>
+          </a:prstGeom>
+          <a:noFill/>
+        </p:spPr>
+        <p:txBody>
+          <a:bodyPr wrap="square">
+            <a:spAutoFit/>
+          </a:bodyPr>
+          <a:lstStyle/>
+          <a:p>
+            <a:pPr algn="r"/>
+            <a:r>
+              <a:rPr sz="1100">
+                <a:solidFill>
+                  <a:srgbClr val="6B7280"/>
+                </a:solidFill>
+              </a:rPr>
+              <a:t>18</a:t>
             </a:r>
           </a:p>
         </p:txBody>
@@ -5747,7 +5931,7 @@
                   <a:srgbClr val="134E4A"/>
                 </a:solidFill>
               </a:rPr>
-              <a:t>The API surface</a:t>
+              <a:t>The Term &amp; Tag Dictionary</a:t>
             </a:r>
           </a:p>
           <a:p>
@@ -5757,7 +5941,7 @@
                   <a:srgbClr val="0F766E"/>
                 </a:solidFill>
               </a:rPr>
-              <a:t>what this workshop touches</a:t>
+              <a:t>one governed vocabulary</a:t>
             </a:r>
           </a:p>
         </p:txBody>
@@ -5840,71 +6024,71 @@
                 </a:solidFill>
                 <a:latin typeface="Calibri"/>
               </a:rPr>
-              <a:t>— Auth      POST /auth                                  → the bearer token</a:t>
-            </a:r>
-          </a:p>
-          <a:p>
-            <a:pPr>
-              <a:spcAft>
-                <a:spcPts val="1300"/>
-              </a:spcAft>
-            </a:pPr>
-            <a:r>
-              <a:rPr sz="1600">
-                <a:solidFill>
-                  <a:srgbClr val="1F2A37"/>
-                </a:solidFill>
-                <a:latin typeface="Calibri"/>
-              </a:rPr>
-              <a:t>— Search    POST /search                                → a term's id + glossaryId</a:t>
-            </a:r>
-          </a:p>
-          <a:p>
-            <a:pPr>
-              <a:spcAft>
-                <a:spcPts val="1300"/>
-              </a:spcAft>
-            </a:pPr>
-            <a:r>
-              <a:rPr sz="1600">
-                <a:solidFill>
-                  <a:srgbClr val="1F2A37"/>
-                </a:solidFill>
-                <a:latin typeface="Calibri"/>
-              </a:rPr>
-              <a:t>— Entities  POST /entities/filter                       → find a column entity</a:t>
-            </a:r>
-          </a:p>
-          <a:p>
-            <a:pPr>
-              <a:spcAft>
-                <a:spcPts val="1300"/>
-              </a:spcAft>
-            </a:pPr>
-            <a:r>
-              <a:rPr sz="1600">
-                <a:solidFill>
-                  <a:srgbClr val="1F2A37"/>
-                </a:solidFill>
-                <a:latin typeface="Calibri"/>
-              </a:rPr>
-              <a:t>— Entities  PATCH /entities/{id}                        → write businessTerms + features</a:t>
-            </a:r>
-          </a:p>
-          <a:p>
-            <a:pPr>
-              <a:spcAft>
-                <a:spcPts val="1300"/>
-              </a:spcAft>
-            </a:pPr>
-            <a:r>
-              <a:rPr sz="1600">
-                <a:solidFill>
-                  <a:srgbClr val="1F2A37"/>
-                </a:solidFill>
-                <a:latin typeface="Calibri"/>
-              </a:rPr>
-              <a:t>— Jobs      /jobs/execute/calculate-trust-score · /data-discovery · /{id}/status</a:t>
+              <a:t>— A generic baseline (protected) plus a company layer seeded from the domain pack and grown from scans.</a:t>
+            </a:r>
+          </a:p>
+          <a:p>
+            <a:pPr>
+              <a:spcAft>
+                <a:spcPts val="1300"/>
+              </a:spcAft>
+            </a:pPr>
+            <a:r>
+              <a:rPr sz="1600">
+                <a:solidFill>
+                  <a:srgbClr val="1F2A37"/>
+                </a:solidFill>
+                <a:latin typeface="Calibri"/>
+              </a:rPr>
+              <a:t>— Scan-grown vocabulary lands in PENDING and governs nothing until a steward approves it.</a:t>
+            </a:r>
+          </a:p>
+          <a:p>
+            <a:pPr>
+              <a:spcAft>
+                <a:spcPts val="1300"/>
+              </a:spcAft>
+            </a:pPr>
+            <a:r>
+              <a:rPr sz="1600">
+                <a:solidFill>
+                  <a:srgbClr val="1F2A37"/>
+                </a:solidFill>
+                <a:latin typeface="Calibri"/>
+              </a:rPr>
+              <a:t>— It is embedded in the Registry at export — so the Policy Generator can only use the same allow-list.</a:t>
+            </a:r>
+          </a:p>
+          <a:p>
+            <a:pPr>
+              <a:spcAft>
+                <a:spcPts val="1300"/>
+              </a:spcAft>
+            </a:pPr>
+            <a:r>
+              <a:rPr sz="1600">
+                <a:solidFill>
+                  <a:srgbClr val="1F2A37"/>
+                </a:solidFill>
+                <a:latin typeface="Calibri"/>
+              </a:rPr>
+              <a:t>— That is the tag-consistency contract between the two apps.</a:t>
+            </a:r>
+          </a:p>
+          <a:p>
+            <a:pPr>
+              <a:spcAft>
+                <a:spcPts val="1300"/>
+              </a:spcAft>
+            </a:pPr>
+            <a:r>
+              <a:rPr sz="1600">
+                <a:solidFill>
+                  <a:srgbClr val="1F2A37"/>
+                </a:solidFill>
+                <a:latin typeface="Calibri"/>
+              </a:rPr>
+              <a:t>— Sensitivity is ORDINAL: tags and canonical terms can only raise a classification, never lower it.</a:t>
             </a:r>
           </a:p>
         </p:txBody>
@@ -6303,7 +6487,7 @@
                   <a:srgbClr val="134E4A"/>
                 </a:solidFill>
               </a:rPr>
-              <a:t>Lab A · Authenticate</a:t>
+              <a:t>Step 3 · Govern and generate</a:t>
             </a:r>
           </a:p>
           <a:p>
@@ -6313,7 +6497,7 @@
                   <a:srgbClr val="0F766E"/>
                 </a:solidFill>
               </a:rPr>
-              <a:t>know who you are before writing</a:t>
+              <a:t>stewardship baked in</a:t>
             </a:r>
           </a:p>
         </p:txBody>
@@ -6396,55 +6580,71 @@
                 </a:solidFill>
                 <a:latin typeface="Calibri"/>
               </a:rPr>
-              <a:t>— POST /api/public/v2/auth, form-encoded; the token comes back under data.accessToken.</a:t>
-            </a:r>
-          </a:p>
-          <a:p>
-            <a:pPr>
-              <a:spcAft>
-                <a:spcPts val="1300"/>
-              </a:spcAft>
-            </a:pPr>
-            <a:r>
-              <a:rPr sz="1600">
-                <a:solidFill>
-                  <a:srgbClr val="1F2A37"/>
-                </a:solidFill>
-                <a:latin typeface="Calibri"/>
-              </a:rPr>
-              <a:t>— Or straight from Keycloak's realm token endpoint — the same JWT under .access_token.</a:t>
-            </a:r>
-          </a:p>
-          <a:p>
-            <a:pPr>
-              <a:spcAft>
-                <a:spcPts val="1300"/>
-              </a:spcAft>
-            </a:pPr>
-            <a:r>
-              <a:rPr sz="1600">
-                <a:solidFill>
-                  <a:srgbClr val="1F2A37"/>
-                </a:solidFill>
-                <a:latin typeface="Calibri"/>
-              </a:rPr>
-              <a:t>— Get token reports WHO the token belongs to — roles and expiry — before anything writes.</a:t>
-            </a:r>
-          </a:p>
-          <a:p>
-            <a:pPr>
-              <a:spcAft>
-                <a:spcPts val="1300"/>
-              </a:spcAft>
-            </a:pPr>
-            <a:r>
-              <a:rPr sz="1600">
-                <a:solidFill>
-                  <a:srgbClr val="1F2A37"/>
-                </a:solidFill>
-                <a:latin typeface="Calibri"/>
-              </a:rPr>
-              <a:t>— Tokens expire. Re-auth on a 401. Never persist one.</a:t>
+              <a:t>— Build the roster by hand or fetch it live from Keycloak, so accounts match the target instance.</a:t>
+            </a:r>
+          </a:p>
+          <a:p>
+            <a:pPr>
+              <a:spcAft>
+                <a:spcPts val="1300"/>
+              </a:spcAft>
+            </a:pPr>
+            <a:r>
+              <a:rPr sz="1600">
+                <a:solidFill>
+                  <a:srgbClr val="1F2A37"/>
+                </a:solidFill>
+                <a:latin typeface="Calibri"/>
+              </a:rPr>
+              <a:t>— Set steward / owner / custodian / status / rating — globally or per category.</a:t>
+            </a:r>
+          </a:p>
+          <a:p>
+            <a:pPr>
+              <a:spcAft>
+                <a:spcPts val="1300"/>
+              </a:spcAft>
+            </a:pPr>
+            <a:r>
+              <a:rPr sz="1600">
+                <a:solidFill>
+                  <a:srgbClr val="1F2A37"/>
+                </a:solidFill>
+                <a:latin typeface="Calibri"/>
+              </a:rPr>
+              <a:t>— People and terms bind by per-instance UUID, never display name.</a:t>
+            </a:r>
+          </a:p>
+          <a:p>
+            <a:pPr>
+              <a:spcAft>
+                <a:spcPts val="1300"/>
+              </a:spcAft>
+            </a:pPr>
+            <a:r>
+              <a:rPr sz="1600">
+                <a:solidFill>
+                  <a:srgbClr val="1F2A37"/>
+                </a:solidFill>
+                <a:latin typeface="Calibri"/>
+              </a:rPr>
+              <a:t>— Generate writes the JSONL and the Registry. Import replaces the WHOLE glossary, not a delta.</a:t>
+            </a:r>
+          </a:p>
+          <a:p>
+            <a:pPr>
+              <a:spcAft>
+                <a:spcPts val="1300"/>
+              </a:spcAft>
+            </a:pPr>
+            <a:r>
+              <a:rPr sz="1600">
+                <a:solidFill>
+                  <a:srgbClr val="1F2A37"/>
+                </a:solidFill>
+                <a:latin typeface="Calibri"/>
+              </a:rPr>
+              <a:t>— Draft policies (AI) also emits Quality/ DQ rules: format, allowed_values, not_null, unique, valid_date, numeric.</a:t>
             </a:r>
           </a:p>
         </p:txBody>
@@ -6510,7 +6710,7 @@
         <p:spPr>
           <a:xfrm>
             <a:off x="0" y="0"/>
-            <a:ext cx="12191695" cy="128016"/>
+            <a:ext cx="12191695" cy="6858000"/>
           </a:xfrm>
           <a:prstGeom prst="rect">
             <a:avLst/>
@@ -6553,8 +6753,8 @@
         </p:nvSpPr>
         <p:spPr>
           <a:xfrm>
-            <a:off x="777240" y="502920"/>
-            <a:ext cx="10637215" cy="1005840"/>
+            <a:off x="914400" y="2194560"/>
+            <a:ext cx="10362895" cy="2377440"/>
           </a:xfrm>
           <a:prstGeom prst="rect">
             <a:avLst/>
@@ -6568,187 +6768,22 @@
           <a:lstStyle/>
           <a:p>
             <a:r>
-              <a:rPr sz="3000" b="1">
-                <a:solidFill>
-                  <a:srgbClr val="134E4A"/>
-                </a:solidFill>
-              </a:rPr>
-              <a:t>Lab B · Resolve term IDs</a:t>
-            </a:r>
-          </a:p>
-          <a:p>
-            <a:r>
-              <a:rPr sz="1500" i="1">
-                <a:solidFill>
-                  <a:srgbClr val="0F766E"/>
-                </a:solidFill>
-              </a:rPr>
-              <a:t>why import has to come first</a:t>
-            </a:r>
-          </a:p>
-        </p:txBody>
-      </p:sp>
-      <p:sp>
-        <p:nvSpPr>
-          <p:cNvPr id="4" name="Rectangle 3"/>
-          <p:cNvSpPr/>
-          <p:nvPr/>
-        </p:nvSpPr>
-        <p:spPr>
-          <a:xfrm>
-            <a:off x="777240" y="1755648"/>
-            <a:ext cx="10637215" cy="15240"/>
-          </a:xfrm>
-          <a:prstGeom prst="rect">
-            <a:avLst/>
-          </a:prstGeom>
-          <a:solidFill>
-            <a:srgbClr val="E5E7EB"/>
-          </a:solidFill>
-          <a:ln>
-            <a:noFill/>
-          </a:ln>
-          <a:effectLst/>
-        </p:spPr>
-        <p:style>
-          <a:lnRef idx="1">
-            <a:schemeClr val="accent1"/>
-          </a:lnRef>
-          <a:fillRef idx="3">
-            <a:schemeClr val="accent1"/>
-          </a:fillRef>
-          <a:effectRef idx="2">
-            <a:schemeClr val="accent1"/>
-          </a:effectRef>
-          <a:fontRef idx="minor">
-            <a:schemeClr val="lt1"/>
-          </a:fontRef>
-        </p:style>
-        <p:txBody>
-          <a:bodyPr rtlCol="0" anchor="ctr"/>
-          <a:lstStyle/>
-          <a:p>
-            <a:pPr algn="ctr"/>
-          </a:p>
-        </p:txBody>
-      </p:sp>
-      <p:sp>
-        <p:nvSpPr>
-          <p:cNvPr id="5" name="TextBox 4"/>
-          <p:cNvSpPr txBox="1"/>
-          <p:nvPr/>
-        </p:nvSpPr>
-        <p:spPr>
-          <a:xfrm>
-            <a:off x="777240" y="1965960"/>
-            <a:ext cx="10637215" cy="4206240"/>
-          </a:xfrm>
-          <a:prstGeom prst="rect">
-            <a:avLst/>
-          </a:prstGeom>
-          <a:noFill/>
-        </p:spPr>
-        <p:txBody>
-          <a:bodyPr wrap="square">
-            <a:spAutoFit/>
-          </a:bodyPr>
-          <a:lstStyle/>
-          <a:p>
-            <a:pPr>
-              <a:spcAft>
-                <a:spcPts val="1300"/>
-              </a:spcAft>
-            </a:pPr>
-            <a:r>
-              <a:rPr sz="1600">
-                <a:solidFill>
-                  <a:srgbClr val="1F2A37"/>
-                </a:solidFill>
-                <a:latin typeface="Calibri"/>
-              </a:rPr>
-              <a:t>— POST /search { searchTerm, searchFacets: { type: ["term"] } }</a:t>
-            </a:r>
-          </a:p>
-          <a:p>
-            <a:pPr>
-              <a:spcAft>
-                <a:spcPts val="1300"/>
-              </a:spcAft>
-            </a:pPr>
-            <a:r>
-              <a:rPr sz="1600">
-                <a:solidFill>
-                  <a:srgbClr val="1F2A37"/>
-                </a:solidFill>
-                <a:latin typeface="Calibri"/>
-              </a:rPr>
-              <a:t>— A term hit carries its own _id (the term id) and rootId (its glossary).</a:t>
-            </a:r>
-          </a:p>
-          <a:p>
-            <a:pPr>
-              <a:spcAft>
-                <a:spcPts val="1300"/>
-              </a:spcAft>
-            </a:pPr>
-            <a:r>
-              <a:rPr sz="1600">
-                <a:solidFill>
-                  <a:srgbClr val="1F2A37"/>
-                </a:solidFill>
-                <a:latin typeface="Calibri"/>
-              </a:rPr>
-              <a:t>— A term has NO id until it exists in PDC — which is why the glossary is imported before this step.</a:t>
-            </a:r>
-          </a:p>
-          <a:p>
-            <a:pPr>
-              <a:spcAft>
-                <a:spcPts val="1300"/>
-              </a:spcAft>
-            </a:pPr>
-            <a:r>
-              <a:rPr sz="1600">
-                <a:solidFill>
-                  <a:srgbClr val="1F2A37"/>
-                </a:solidFill>
-                <a:latin typeface="Calibri"/>
-              </a:rPr>
-              <a:t>— Resolve matches by NAME. Two terms sharing a name cannot be told apart here.</a:t>
-            </a:r>
-          </a:p>
-        </p:txBody>
-      </p:sp>
-      <p:sp>
-        <p:nvSpPr>
-          <p:cNvPr id="6" name="TextBox 5"/>
-          <p:cNvSpPr txBox="1"/>
-          <p:nvPr/>
-        </p:nvSpPr>
-        <p:spPr>
-          <a:xfrm>
-            <a:off x="11002975" y="6291072"/>
-            <a:ext cx="731520" cy="320040"/>
-          </a:xfrm>
-          <a:prstGeom prst="rect">
-            <a:avLst/>
-          </a:prstGeom>
-          <a:noFill/>
-        </p:spPr>
-        <p:txBody>
-          <a:bodyPr wrap="square">
-            <a:spAutoFit/>
-          </a:bodyPr>
-          <a:lstStyle/>
-          <a:p>
-            <a:pPr algn="r"/>
-            <a:r>
-              <a:rPr sz="1100">
-                <a:solidFill>
-                  <a:srgbClr val="6B7280"/>
-                </a:solidFill>
-              </a:rPr>
-              <a:t>21</a:t>
+              <a:rPr sz="4000" b="1">
+                <a:solidFill>
+                  <a:srgbClr val="FFFFFF"/>
+                </a:solidFill>
+              </a:rPr>
+              <a:t>Part 2</a:t>
+            </a:r>
+          </a:p>
+          <a:p>
+            <a:r>
+              <a:rPr sz="2400">
+                <a:solidFill>
+                  <a:srgbClr val="FFFFFF"/>
+                </a:solidFill>
+              </a:rPr>
+              <a:t>The PDC Public API</a:t>
             </a:r>
           </a:p>
         </p:txBody>
@@ -6843,7 +6878,7 @@
                   <a:srgbClr val="134E4A"/>
                 </a:solidFill>
               </a:rPr>
-              <a:t>Lab C · Which terms get written</a:t>
+              <a:t>The API surface</a:t>
             </a:r>
           </a:p>
           <a:p>
@@ -6853,7 +6888,7 @@
                   <a:srgbClr val="0F766E"/>
                 </a:solidFill>
               </a:rPr>
-              <a:t>map by business value, not volume</a:t>
+              <a:t>what this workshop touches</a:t>
             </a:r>
           </a:p>
         </p:txBody>
@@ -6936,55 +6971,71 @@
                 </a:solidFill>
                 <a:latin typeface="Calibri"/>
               </a:rPr>
-              <a:t>— Mapped: Critical Data Elements, PII columns, and terms with real evidence (comment, key, or profiling hit).</a:t>
-            </a:r>
-          </a:p>
-          <a:p>
-            <a:pPr>
-              <a:spcAft>
-                <a:spcPts val="1300"/>
-              </a:spcAft>
-            </a:pPr>
-            <a:r>
-              <a:rPr sz="1600">
-                <a:solidFill>
-                  <a:srgbClr val="1F2A37"/>
-                </a:solidFill>
-                <a:latin typeface="Calibri"/>
-              </a:rPr>
-              <a:t>— Held back: low-confidence names, and conceptual terms with no physical column.</a:t>
-            </a:r>
-          </a:p>
-          <a:p>
-            <a:pPr>
-              <a:spcAft>
-                <a:spcPts val="1300"/>
-              </a:spcAft>
-            </a:pPr>
-            <a:r>
-              <a:rPr sz="1600">
-                <a:solidFill>
-                  <a:srgbClr val="1F2A37"/>
-                </a:solidFill>
-                <a:latin typeface="Calibri"/>
-              </a:rPr>
-              <a:t>— A per-row Map = Yes/No always beats the policy.</a:t>
-            </a:r>
-          </a:p>
-          <a:p>
-            <a:pPr>
-              <a:spcAft>
-                <a:spcPts val="1300"/>
-              </a:spcAft>
-            </a:pPr>
-            <a:r>
-              <a:rPr sz="1600">
-                <a:solidFill>
-                  <a:srgbClr val="1F2A37"/>
-                </a:solidFill>
-                <a:latin typeface="Calibri"/>
-              </a:rPr>
-              <a:t>— Over-linking pollutes lineage, search and impact analysis — and does nothing for Trust Score, whose term input is binary.</a:t>
+              <a:t>— Auth      POST /auth                                  → the bearer token</a:t>
+            </a:r>
+          </a:p>
+          <a:p>
+            <a:pPr>
+              <a:spcAft>
+                <a:spcPts val="1300"/>
+              </a:spcAft>
+            </a:pPr>
+            <a:r>
+              <a:rPr sz="1600">
+                <a:solidFill>
+                  <a:srgbClr val="1F2A37"/>
+                </a:solidFill>
+                <a:latin typeface="Calibri"/>
+              </a:rPr>
+              <a:t>— Search    POST /search                                → a term's id + glossaryId</a:t>
+            </a:r>
+          </a:p>
+          <a:p>
+            <a:pPr>
+              <a:spcAft>
+                <a:spcPts val="1300"/>
+              </a:spcAft>
+            </a:pPr>
+            <a:r>
+              <a:rPr sz="1600">
+                <a:solidFill>
+                  <a:srgbClr val="1F2A37"/>
+                </a:solidFill>
+                <a:latin typeface="Calibri"/>
+              </a:rPr>
+              <a:t>— Entities  POST /entities/filter                       → find a column entity</a:t>
+            </a:r>
+          </a:p>
+          <a:p>
+            <a:pPr>
+              <a:spcAft>
+                <a:spcPts val="1300"/>
+              </a:spcAft>
+            </a:pPr>
+            <a:r>
+              <a:rPr sz="1600">
+                <a:solidFill>
+                  <a:srgbClr val="1F2A37"/>
+                </a:solidFill>
+                <a:latin typeface="Calibri"/>
+              </a:rPr>
+              <a:t>— Entities  PATCH /entities/{id}                        → write businessTerms + features</a:t>
+            </a:r>
+          </a:p>
+          <a:p>
+            <a:pPr>
+              <a:spcAft>
+                <a:spcPts val="1300"/>
+              </a:spcAft>
+            </a:pPr>
+            <a:r>
+              <a:rPr sz="1600">
+                <a:solidFill>
+                  <a:srgbClr val="1F2A37"/>
+                </a:solidFill>
+                <a:latin typeface="Calibri"/>
+              </a:rPr>
+              <a:t>— Jobs      /jobs/execute/calculate-trust-score · /data-discovery · /{id}/status</a:t>
             </a:r>
           </a:p>
         </p:txBody>
@@ -7113,7 +7164,7 @@
                   <a:srgbClr val="134E4A"/>
                 </a:solidFill>
               </a:rPr>
-              <a:t>Lab C · Apply — the centrepiece</a:t>
+              <a:t>Lab A · Authenticate</a:t>
             </a:r>
           </a:p>
           <a:p>
@@ -7123,7 +7174,7 @@
                   <a:srgbClr val="0F766E"/>
                 </a:solidFill>
               </a:rPr>
-              <a:t>merge, never replace</a:t>
+              <a:t>know who you are before writing</a:t>
             </a:r>
           </a:p>
         </p:txBody>
@@ -7206,71 +7257,55 @@
                 </a:solidFill>
                 <a:latin typeface="Calibri"/>
               </a:rPr>
-              <a:t>— Resolve the column → read what is there → union the terms → PATCH the superset.</a:t>
-            </a:r>
-          </a:p>
-          <a:p>
-            <a:pPr>
-              <a:spcAft>
-                <a:spcPts val="1300"/>
-              </a:spcAft>
-            </a:pPr>
-            <a:r>
-              <a:rPr sz="1600">
-                <a:solidFill>
-                  <a:srgbClr val="1F2A37"/>
-                </a:solidFill>
-                <a:latin typeface="Calibri"/>
-              </a:rPr>
-              <a:t>— PATCH contract: ARRAYS FULLY REPLACE. Sending just the new term would drop the existing ones.</a:t>
-            </a:r>
-          </a:p>
-          <a:p>
-            <a:pPr>
-              <a:spcAft>
-                <a:spcPts val="1300"/>
-              </a:spcAft>
-            </a:pPr>
-            <a:r>
-              <a:rPr sz="1600">
-                <a:solidFill>
-                  <a:srgbClr val="1F2A37"/>
-                </a:solidFill>
-                <a:latin typeface="Calibri"/>
-              </a:rPr>
-              <a:t>— businessTerms accepts six keys only: id, glossaryId, name, sourceName, sourceType, confidenceScore.</a:t>
-            </a:r>
-          </a:p>
-          <a:p>
-            <a:pPr>
-              <a:spcAft>
-                <a:spcPts val="1300"/>
-              </a:spcAft>
-            </a:pPr>
-            <a:r>
-              <a:rPr sz="1600">
-                <a:solidFill>
-                  <a:srgbClr val="1F2A37"/>
-                </a:solidFill>
-                <a:latin typeface="Calibri"/>
-              </a:rPr>
-              <a:t>— Any extra key — notably the app's own glossary display name — makes PDC reject the whole PATCH with a 400.</a:t>
-            </a:r>
-          </a:p>
-          <a:p>
-            <a:pPr>
-              <a:spcAft>
-                <a:spcPts val="1300"/>
-              </a:spcAft>
-            </a:pPr>
-            <a:r>
-              <a:rPr sz="1600">
-                <a:solidFill>
-                  <a:srgbClr val="1F2A37"/>
-                </a:solidFill>
-                <a:latin typeface="Calibri"/>
-              </a:rPr>
-              <a:t>— Dry-run first, every time you point at a new instance.</a:t>
+              <a:t>— POST /api/public/v2/auth, form-encoded; the token comes back under data.accessToken.</a:t>
+            </a:r>
+          </a:p>
+          <a:p>
+            <a:pPr>
+              <a:spcAft>
+                <a:spcPts val="1300"/>
+              </a:spcAft>
+            </a:pPr>
+            <a:r>
+              <a:rPr sz="1600">
+                <a:solidFill>
+                  <a:srgbClr val="1F2A37"/>
+                </a:solidFill>
+                <a:latin typeface="Calibri"/>
+              </a:rPr>
+              <a:t>— Or straight from Keycloak's realm token endpoint — the same JWT under .access_token.</a:t>
+            </a:r>
+          </a:p>
+          <a:p>
+            <a:pPr>
+              <a:spcAft>
+                <a:spcPts val="1300"/>
+              </a:spcAft>
+            </a:pPr>
+            <a:r>
+              <a:rPr sz="1600">
+                <a:solidFill>
+                  <a:srgbClr val="1F2A37"/>
+                </a:solidFill>
+                <a:latin typeface="Calibri"/>
+              </a:rPr>
+              <a:t>— Get token reports WHO the token belongs to — roles and expiry — before anything writes.</a:t>
+            </a:r>
+          </a:p>
+          <a:p>
+            <a:pPr>
+              <a:spcAft>
+                <a:spcPts val="1300"/>
+              </a:spcAft>
+            </a:pPr>
+            <a:r>
+              <a:rPr sz="1600">
+                <a:solidFill>
+                  <a:srgbClr val="1F2A37"/>
+                </a:solidFill>
+                <a:latin typeface="Calibri"/>
+              </a:rPr>
+              <a:t>— Tokens expire. Re-auth on a 401. Never persist one.</a:t>
             </a:r>
           </a:p>
         </p:txBody>
@@ -7399,7 +7434,7 @@
                   <a:srgbClr val="134E4A"/>
                 </a:solidFill>
               </a:rPr>
-              <a:t>Lab D · Trust Score</a:t>
+              <a:t>Lab B · Resolve term IDs</a:t>
             </a:r>
           </a:p>
           <a:p>
@@ -7409,7 +7444,7 @@
                   <a:srgbClr val="0F766E"/>
                 </a:solidFill>
               </a:rPr>
-              <a:t>a table/file rollup, never a column score</a:t>
+              <a:t>why import has to come first</a:t>
             </a:r>
           </a:p>
         </p:txBody>
@@ -7492,71 +7527,55 @@
                 </a:solidFill>
                 <a:latin typeface="Calibri"/>
               </a:rPr>
-              <a:t>— PDC scores TABLES and FILES. A column never receives a Trust Score.</a:t>
-            </a:r>
-          </a:p>
-          <a:p>
-            <a:pPr>
-              <a:spcAft>
-                <a:spcPts val="1300"/>
-              </a:spcAft>
-            </a:pPr>
-            <a:r>
-              <a:rPr sz="1600">
-                <a:solidFill>
-                  <a:srgbClr val="1F2A37"/>
-                </a:solidFill>
-                <a:latin typeface="Calibri"/>
-              </a:rPr>
-              <a:t>— The app writes qualityScore + rating onto columns, then rolls the mean up to the table.</a:t>
-            </a:r>
-          </a:p>
-          <a:p>
-            <a:pPr>
-              <a:spcAft>
-                <a:spcPts val="1300"/>
-              </a:spcAft>
-            </a:pPr>
-            <a:r>
-              <a:rPr sz="1600">
-                <a:solidFill>
-                  <a:srgbClr val="1F2A37"/>
-                </a:solidFill>
-                <a:latin typeface="Calibri"/>
-              </a:rPr>
-              <a:t>— The job's scope is therefore TABLE / FILE ids.</a:t>
-            </a:r>
-          </a:p>
-          <a:p>
-            <a:pPr>
-              <a:spcAft>
-                <a:spcPts val="1300"/>
-              </a:spcAft>
-            </a:pPr>
-            <a:r>
-              <a:rPr sz="1600">
-                <a:solidFill>
-                  <a:srgbClr val="1F2A37"/>
-                </a:solidFill>
-                <a:latin typeface="Calibri"/>
-              </a:rPr>
-              <a:t>— Four inputs: a linked glossary term, verified lineage, a user rating, and Data Quality.</a:t>
-            </a:r>
-          </a:p>
-          <a:p>
-            <a:pPr>
-              <a:spcAft>
-                <a:spcPts val="1300"/>
-              </a:spcAft>
-            </a:pPr>
-            <a:r>
-              <a:rPr sz="1600">
-                <a:solidFill>
-                  <a:srgbClr val="1F2A37"/>
-                </a:solidFill>
-                <a:latin typeface="Calibri"/>
-              </a:rPr>
-              <a:t>— The app creates table-level terms; the Steward links them by hand.</a:t>
+              <a:t>— POST /search { searchTerm, searchFacets: { type: ["term"] } }</a:t>
+            </a:r>
+          </a:p>
+          <a:p>
+            <a:pPr>
+              <a:spcAft>
+                <a:spcPts val="1300"/>
+              </a:spcAft>
+            </a:pPr>
+            <a:r>
+              <a:rPr sz="1600">
+                <a:solidFill>
+                  <a:srgbClr val="1F2A37"/>
+                </a:solidFill>
+                <a:latin typeface="Calibri"/>
+              </a:rPr>
+              <a:t>— A term hit carries its own _id (the term id) and rootId (its glossary).</a:t>
+            </a:r>
+          </a:p>
+          <a:p>
+            <a:pPr>
+              <a:spcAft>
+                <a:spcPts val="1300"/>
+              </a:spcAft>
+            </a:pPr>
+            <a:r>
+              <a:rPr sz="1600">
+                <a:solidFill>
+                  <a:srgbClr val="1F2A37"/>
+                </a:solidFill>
+                <a:latin typeface="Calibri"/>
+              </a:rPr>
+              <a:t>— A term has NO id until it exists in PDC — which is why the glossary is imported before this step.</a:t>
+            </a:r>
+          </a:p>
+          <a:p>
+            <a:pPr>
+              <a:spcAft>
+                <a:spcPts val="1300"/>
+              </a:spcAft>
+            </a:pPr>
+            <a:r>
+              <a:rPr sz="1600">
+                <a:solidFill>
+                  <a:srgbClr val="1F2A37"/>
+                </a:solidFill>
+                <a:latin typeface="Calibri"/>
+              </a:rPr>
+              <a:t>— Resolve matches by NAME. Two terms sharing a name cannot be told apart here.</a:t>
             </a:r>
           </a:p>
         </p:txBody>
@@ -7685,7 +7704,7 @@
                   <a:srgbClr val="134E4A"/>
                 </a:solidFill>
               </a:rPr>
-              <a:t>Labs E &amp; F · Compare and profile</a:t>
+              <a:t>Lab C · Which terms get written</a:t>
             </a:r>
           </a:p>
           <a:p>
@@ -7695,7 +7714,7 @@
                   <a:srgbClr val="0F766E"/>
                 </a:solidFill>
               </a:rPr>
-              <a:t>close the loop</a:t>
+              <a:t>map by business value, not volume</a:t>
             </a:r>
           </a:p>
         </p:txBody>
@@ -7778,55 +7797,55 @@
                 </a:solidFill>
                 <a:latin typeface="Calibri"/>
               </a:rPr>
-              <a:t>— E — POST /entities/filter/profiling-info lays PDC's numbers beside the app's, column by column.</a:t>
-            </a:r>
-          </a:p>
-          <a:p>
-            <a:pPr>
-              <a:spcAft>
-                <a:spcPts val="1300"/>
-              </a:spcAft>
-            </a:pPr>
-            <a:r>
-              <a:rPr sz="1600">
-                <a:solidFill>
-                  <a:srgbClr val="1F2A37"/>
-                </a:solidFill>
-                <a:latin typeface="Calibri"/>
-              </a:rPr>
-              <a:t>— Close agreement validates the heuristics; big gaps usually mean a different sample, or not profiled yet.</a:t>
-            </a:r>
-          </a:p>
-          <a:p>
-            <a:pPr>
-              <a:spcAft>
-                <a:spcPts val="1300"/>
-              </a:spcAft>
-            </a:pPr>
-            <a:r>
-              <a:rPr sz="1600">
-                <a:solidFill>
-                  <a:srgbClr val="1F2A37"/>
-                </a:solidFill>
-                <a:latin typeface="Calibri"/>
-              </a:rPr>
-              <a:t>— F — POST /jobs/execute/data-discovery profiles object-store documents.</a:t>
-            </a:r>
-          </a:p>
-          <a:p>
-            <a:pPr>
-              <a:spcAft>
-                <a:spcPts val="1300"/>
-              </a:spcAft>
-            </a:pPr>
-            <a:r>
-              <a:rPr sz="1600">
-                <a:solidFill>
-                  <a:srgbClr val="1F2A37"/>
-                </a:solidFill>
-                <a:latin typeface="Calibri"/>
-              </a:rPr>
-              <a:t>— withProfile is v3-only. Databases are profiled by structured Data Profiling, not Data Discovery.</a:t>
+              <a:t>— Mapped: Critical Data Elements, PII columns, and terms with real evidence (comment, key, or profiling hit).</a:t>
+            </a:r>
+          </a:p>
+          <a:p>
+            <a:pPr>
+              <a:spcAft>
+                <a:spcPts val="1300"/>
+              </a:spcAft>
+            </a:pPr>
+            <a:r>
+              <a:rPr sz="1600">
+                <a:solidFill>
+                  <a:srgbClr val="1F2A37"/>
+                </a:solidFill>
+                <a:latin typeface="Calibri"/>
+              </a:rPr>
+              <a:t>— Held back: low-confidence names, and conceptual terms with no physical column.</a:t>
+            </a:r>
+          </a:p>
+          <a:p>
+            <a:pPr>
+              <a:spcAft>
+                <a:spcPts val="1300"/>
+              </a:spcAft>
+            </a:pPr>
+            <a:r>
+              <a:rPr sz="1600">
+                <a:solidFill>
+                  <a:srgbClr val="1F2A37"/>
+                </a:solidFill>
+                <a:latin typeface="Calibri"/>
+              </a:rPr>
+              <a:t>— A per-row Map = Yes/No always beats the policy.</a:t>
+            </a:r>
+          </a:p>
+          <a:p>
+            <a:pPr>
+              <a:spcAft>
+                <a:spcPts val="1300"/>
+              </a:spcAft>
+            </a:pPr>
+            <a:r>
+              <a:rPr sz="1600">
+                <a:solidFill>
+                  <a:srgbClr val="1F2A37"/>
+                </a:solidFill>
+                <a:latin typeface="Calibri"/>
+              </a:rPr>
+              <a:t>— Over-linking pollutes lineage, search and impact analysis — and does nothing for Trust Score, whose term input is binary.</a:t>
             </a:r>
           </a:p>
         </p:txBody>
@@ -7955,7 +7974,7 @@
                   <a:srgbClr val="134E4A"/>
                 </a:solidFill>
               </a:rPr>
-              <a:t>Lab F · Scope a FOLDER, not a file</a:t>
+              <a:t>Lab C · Apply — the centrepiece</a:t>
             </a:r>
           </a:p>
           <a:p>
@@ -7965,7 +7984,7 @@
                   <a:srgbClr val="0F766E"/>
                 </a:solidFill>
               </a:rPr>
-              <a:t>the cascade is the whole point</a:t>
+              <a:t>merge, never replace</a:t>
             </a:r>
           </a:p>
         </p:txBody>
@@ -8048,71 +8067,71 @@
                 </a:solidFill>
                 <a:latin typeface="Calibri"/>
               </a:rPr>
-              <a:t>— Scope a FOLDER entity and PDC profiles it AND every file inside. Scope a FILE and you get that file only.</a:t>
-            </a:r>
-          </a:p>
-          <a:p>
-            <a:pPr>
-              <a:spcAft>
-                <a:spcPts val="1300"/>
-              </a:spcAft>
-            </a:pPr>
-            <a:r>
-              <a:rPr sz="1600">
-                <a:solidFill>
-                  <a:srgbClr val="1F2A37"/>
-                </a:solidFill>
-                <a:latin typeface="Calibri"/>
-              </a:rPr>
-              <a:t>— A Data-Elements payload carries ONE representative file per folder — so file scope profiles 5 of 16 and still returns SUCCESS.</a:t>
-            </a:r>
-          </a:p>
-          <a:p>
-            <a:pPr>
-              <a:spcAft>
-                <a:spcPts val="1300"/>
-              </a:spcAft>
-            </a:pPr>
-            <a:r>
-              <a:rPr sz="1600">
-                <a:solidFill>
-                  <a:srgbClr val="1F2A37"/>
-                </a:solidFill>
-                <a:latin typeface="Calibri"/>
-              </a:rPr>
-              <a:t>— Read the run message: 'awc-documents/compliance' (slashed) = folder, cascading. Dotted = the file fallback.</a:t>
-            </a:r>
-          </a:p>
-          <a:p>
-            <a:pPr>
-              <a:spcAft>
-                <a:spcPts val="1300"/>
-              </a:spcAft>
-            </a:pPr>
-            <a:r>
-              <a:rPr sz="1600">
-                <a:solidFill>
-                  <a:srgbClr val="1F2A37"/>
-                </a:solidFill>
-                <a:latin typeface="Calibri"/>
-              </a:rPr>
-              <a:t>— GOTCHA: PDC types object-store folders FOLDER, not DIRECTORY — a scan reports '16 FILE + 5 FOLDER entities'.</a:t>
-            </a:r>
-          </a:p>
-          <a:p>
-            <a:pPr>
-              <a:spcAft>
-                <a:spcPts val="1300"/>
-              </a:spcAft>
-            </a:pPr>
-            <a:r>
-              <a:rPr sz="1600">
-                <a:solidFill>
-                  <a:srgbClr val="1F2A37"/>
-                </a:solidFill>
-                <a:latin typeface="Calibri"/>
-              </a:rPr>
-              <a:t>— A filter that omits FOLDER gets no hits at all, and reads exactly like 'that folder is not catalogued'.</a:t>
+              <a:t>— Resolve the column → read what is there → union the terms → PATCH the superset.</a:t>
+            </a:r>
+          </a:p>
+          <a:p>
+            <a:pPr>
+              <a:spcAft>
+                <a:spcPts val="1300"/>
+              </a:spcAft>
+            </a:pPr>
+            <a:r>
+              <a:rPr sz="1600">
+                <a:solidFill>
+                  <a:srgbClr val="1F2A37"/>
+                </a:solidFill>
+                <a:latin typeface="Calibri"/>
+              </a:rPr>
+              <a:t>— PATCH contract: ARRAYS FULLY REPLACE. Sending just the new term would drop the existing ones.</a:t>
+            </a:r>
+          </a:p>
+          <a:p>
+            <a:pPr>
+              <a:spcAft>
+                <a:spcPts val="1300"/>
+              </a:spcAft>
+            </a:pPr>
+            <a:r>
+              <a:rPr sz="1600">
+                <a:solidFill>
+                  <a:srgbClr val="1F2A37"/>
+                </a:solidFill>
+                <a:latin typeface="Calibri"/>
+              </a:rPr>
+              <a:t>— businessTerms accepts six keys only: id, glossaryId, name, sourceName, sourceType, confidenceScore.</a:t>
+            </a:r>
+          </a:p>
+          <a:p>
+            <a:pPr>
+              <a:spcAft>
+                <a:spcPts val="1300"/>
+              </a:spcAft>
+            </a:pPr>
+            <a:r>
+              <a:rPr sz="1600">
+                <a:solidFill>
+                  <a:srgbClr val="1F2A37"/>
+                </a:solidFill>
+                <a:latin typeface="Calibri"/>
+              </a:rPr>
+              <a:t>— Any extra key — notably the app's own glossary display name — makes PDC reject the whole PATCH with a 400.</a:t>
+            </a:r>
+          </a:p>
+          <a:p>
+            <a:pPr>
+              <a:spcAft>
+                <a:spcPts val="1300"/>
+              </a:spcAft>
+            </a:pPr>
+            <a:r>
+              <a:rPr sz="1600">
+                <a:solidFill>
+                  <a:srgbClr val="1F2A37"/>
+                </a:solidFill>
+                <a:latin typeface="Calibri"/>
+              </a:rPr>
+              <a:t>— Dry-run first, every time you point at a new instance.</a:t>
             </a:r>
           </a:p>
         </p:txBody>
@@ -8241,7 +8260,7 @@
                   <a:srgbClr val="134E4A"/>
                 </a:solidFill>
               </a:rPr>
-              <a:t>Lab F · SKIPPED is not always a failure</a:t>
+              <a:t>Lab D · Trust Score</a:t>
             </a:r>
           </a:p>
           <a:p>
@@ -8251,7 +8270,7 @@
                   <a:srgbClr val="0F766E"/>
                 </a:solidFill>
               </a:rPr>
-              <a:t>what Discovery can and cannot profile</a:t>
+              <a:t>a table/file rollup, never a column score</a:t>
             </a:r>
           </a:p>
         </p:txBody>
@@ -8334,71 +8353,71 @@
                 </a:solidFill>
                 <a:latin typeface="Calibri"/>
               </a:rPr>
-              <a:t>— csv / tsv / json / jsonl / txt  -&gt;  COMPLETED: columns with rows, cardinality, uniqueness, density, lengths.</a:t>
-            </a:r>
-          </a:p>
-          <a:p>
-            <a:pPr>
-              <a:spcAft>
-                <a:spcPts val="1300"/>
-              </a:spcAft>
-            </a:pPr>
-            <a:r>
-              <a:rPr sz="1600">
-                <a:solidFill>
-                  <a:srgbClr val="1F2A37"/>
-                </a:solidFill>
-                <a:latin typeface="Calibri"/>
-              </a:rPr>
-              <a:t>— pdf / docx  -&gt;  properties and checksum yes (pages, author, title); Profiled Status stays SKIPPED, permanently.</a:t>
-            </a:r>
-          </a:p>
-          <a:p>
-            <a:pPr>
-              <a:spcAft>
-                <a:spcPts val="1300"/>
-              </a:spcAft>
-            </a:pPr>
-            <a:r>
-              <a:rPr sz="1600">
-                <a:solidFill>
-                  <a:srgbClr val="1F2A37"/>
-                </a:solidFill>
-                <a:latin typeface="Calibri"/>
-              </a:rPr>
-              <a:t>— A PDF has no rows or columns to sample, so profiling is meaningless — neither PDC nor the app can score one.</a:t>
-            </a:r>
-          </a:p>
-          <a:p>
-            <a:pPr>
-              <a:spcAft>
-                <a:spcPts val="1300"/>
-              </a:spcAft>
-            </a:pPr>
-            <a:r>
-              <a:rPr sz="1600">
-                <a:solidFill>
-                  <a:srgbClr val="1F2A37"/>
-                </a:solidFill>
-                <a:latin typeface="Calibri"/>
-              </a:rPr>
-              <a:t>— Verify the cascade on a file that was NOT the representative. The representative only proves the scope;</a:t>
-            </a:r>
-          </a:p>
-          <a:p>
-            <a:pPr>
-              <a:spcAft>
-                <a:spcPts val="1300"/>
-              </a:spcAft>
-            </a:pPr>
-            <a:r>
-              <a:rPr sz="1600">
-                <a:solidFill>
-                  <a:srgbClr val="1F2A37"/>
-                </a:solidFill>
-                <a:latin typeface="Calibri"/>
-              </a:rPr>
-              <a:t>— and a PDF proves neither, because it can never profile.</a:t>
+              <a:t>— PDC scores TABLES and FILES. A column never receives a Trust Score.</a:t>
+            </a:r>
+          </a:p>
+          <a:p>
+            <a:pPr>
+              <a:spcAft>
+                <a:spcPts val="1300"/>
+              </a:spcAft>
+            </a:pPr>
+            <a:r>
+              <a:rPr sz="1600">
+                <a:solidFill>
+                  <a:srgbClr val="1F2A37"/>
+                </a:solidFill>
+                <a:latin typeface="Calibri"/>
+              </a:rPr>
+              <a:t>— The app writes qualityScore + rating onto columns, then rolls the mean up to the table.</a:t>
+            </a:r>
+          </a:p>
+          <a:p>
+            <a:pPr>
+              <a:spcAft>
+                <a:spcPts val="1300"/>
+              </a:spcAft>
+            </a:pPr>
+            <a:r>
+              <a:rPr sz="1600">
+                <a:solidFill>
+                  <a:srgbClr val="1F2A37"/>
+                </a:solidFill>
+                <a:latin typeface="Calibri"/>
+              </a:rPr>
+              <a:t>— The job's scope is therefore TABLE / FILE ids.</a:t>
+            </a:r>
+          </a:p>
+          <a:p>
+            <a:pPr>
+              <a:spcAft>
+                <a:spcPts val="1300"/>
+              </a:spcAft>
+            </a:pPr>
+            <a:r>
+              <a:rPr sz="1600">
+                <a:solidFill>
+                  <a:srgbClr val="1F2A37"/>
+                </a:solidFill>
+                <a:latin typeface="Calibri"/>
+              </a:rPr>
+              <a:t>— Four inputs: a linked glossary term, verified lineage, a user rating, and Data Quality.</a:t>
+            </a:r>
+          </a:p>
+          <a:p>
+            <a:pPr>
+              <a:spcAft>
+                <a:spcPts val="1300"/>
+              </a:spcAft>
+            </a:pPr>
+            <a:r>
+              <a:rPr sz="1600">
+                <a:solidFill>
+                  <a:srgbClr val="1F2A37"/>
+                </a:solidFill>
+                <a:latin typeface="Calibri"/>
+              </a:rPr>
+              <a:t>— The app creates table-level terms; the Steward links them by hand.</a:t>
             </a:r>
           </a:p>
         </p:txBody>
@@ -8527,7 +8546,7 @@
                   <a:srgbClr val="134E4A"/>
                 </a:solidFill>
               </a:rPr>
-              <a:t>Alternative input · Harvest</a:t>
+              <a:t>Labs E &amp; F · Compare and profile</a:t>
             </a:r>
           </a:p>
           <a:p>
@@ -8537,7 +8556,7 @@
                   <a:srgbClr val="0F766E"/>
                 </a:solidFill>
               </a:rPr>
-              <a:t>when you cannot scan the source</a:t>
+              <a:t>close the loop</a:t>
             </a:r>
           </a:p>
         </p:txBody>
@@ -8620,55 +8639,55 @@
                 </a:solidFill>
                 <a:latin typeface="Calibri"/>
               </a:rPr>
-              <a:t>— Builds the glossary from what PDC already catalogued — no database connection, no password.</a:t>
-            </a:r>
-          </a:p>
-          <a:p>
-            <a:pPr>
-              <a:spcAft>
-                <a:spcPts val="1300"/>
-              </a:spcAft>
-            </a:pPr>
-            <a:r>
-              <a:rPr sz="1600">
-                <a:solidFill>
-                  <a:srgbClr val="1F2A37"/>
-                </a:solidFill>
-                <a:latin typeface="Calibri"/>
-              </a:rPr>
-              <a:t>— There is no list-all-data-sources call: the app discovers roots via entities/filter.</a:t>
-            </a:r>
-          </a:p>
-          <a:p>
-            <a:pPr>
-              <a:spcAft>
-                <a:spcPts val="1300"/>
-              </a:spcAft>
-            </a:pPr>
-            <a:r>
-              <a:rPr sz="1600">
-                <a:solidFill>
-                  <a:srgbClr val="1F2A37"/>
-                </a:solidFill>
-                <a:latin typeface="Calibri"/>
-              </a:rPr>
-              <a:t>— It reads dataType, keys, nullability, the steward's description, sensitivity and existing terms.</a:t>
-            </a:r>
-          </a:p>
-          <a:p>
-            <a:pPr>
-              <a:spcAft>
-                <a:spcPts val="1300"/>
-              </a:spcAft>
-            </a:pPr>
-            <a:r>
-              <a:rPr sz="1600">
-                <a:solidFill>
-                  <a:srgbClr val="1F2A37"/>
-                </a:solidFill>
-                <a:latin typeface="Calibri"/>
-              </a:rPr>
-              <a:t>— Columns PDC already governs are flagged, so the generator suggests but never silently overwrites.</a:t>
+              <a:t>— E — POST /entities/filter/profiling-info lays PDC's numbers beside the app's, column by column.</a:t>
+            </a:r>
+          </a:p>
+          <a:p>
+            <a:pPr>
+              <a:spcAft>
+                <a:spcPts val="1300"/>
+              </a:spcAft>
+            </a:pPr>
+            <a:r>
+              <a:rPr sz="1600">
+                <a:solidFill>
+                  <a:srgbClr val="1F2A37"/>
+                </a:solidFill>
+                <a:latin typeface="Calibri"/>
+              </a:rPr>
+              <a:t>— Close agreement validates the heuristics; big gaps usually mean a different sample, or not profiled yet.</a:t>
+            </a:r>
+          </a:p>
+          <a:p>
+            <a:pPr>
+              <a:spcAft>
+                <a:spcPts val="1300"/>
+              </a:spcAft>
+            </a:pPr>
+            <a:r>
+              <a:rPr sz="1600">
+                <a:solidFill>
+                  <a:srgbClr val="1F2A37"/>
+                </a:solidFill>
+                <a:latin typeface="Calibri"/>
+              </a:rPr>
+              <a:t>— F — POST /jobs/execute/data-discovery profiles object-store documents.</a:t>
+            </a:r>
+          </a:p>
+          <a:p>
+            <a:pPr>
+              <a:spcAft>
+                <a:spcPts val="1300"/>
+              </a:spcAft>
+            </a:pPr>
+            <a:r>
+              <a:rPr sz="1600">
+                <a:solidFill>
+                  <a:srgbClr val="1F2A37"/>
+                </a:solidFill>
+                <a:latin typeface="Calibri"/>
+              </a:rPr>
+              <a:t>— withProfile is v3-only. Databases are profiled by structured Data Profiling, not Data Discovery.</a:t>
             </a:r>
           </a:p>
         </p:txBody>
@@ -8797,7 +8816,7 @@
                   <a:srgbClr val="134E4A"/>
                 </a:solidFill>
               </a:rPr>
-              <a:t>Before you point it at production</a:t>
+              <a:t>Lab F · Scope a FOLDER, not a file</a:t>
             </a:r>
           </a:p>
           <a:p>
@@ -8807,7 +8826,7 @@
                   <a:srgbClr val="0F766E"/>
                 </a:solidFill>
               </a:rPr>
-              <a:t>the caveats that bite</a:t>
+              <a:t>the cascade is the whole point</a:t>
             </a:r>
           </a:p>
         </p:txBody>
@@ -8890,71 +8909,71 @@
                 </a:solidFill>
                 <a:latin typeface="Calibri"/>
               </a:rPr>
-              <a:t>— Least privilege — glossary read, entity edit, job execute. Business Steward beats admin.</a:t>
-            </a:r>
-          </a:p>
-          <a:p>
-            <a:pPr>
-              <a:spcAft>
-                <a:spcPts val="1300"/>
-              </a:spcAft>
-            </a:pPr>
-            <a:r>
-              <a:rPr sz="1600">
-                <a:solidFill>
-                  <a:srgbClr val="1F2A37"/>
-                </a:solidFill>
-                <a:latin typeface="Calibri"/>
-              </a:rPr>
-              <a:t>— Confirm the path version against YOUR instance's Swagger; the jobs catalog is richest in v3.</a:t>
-            </a:r>
-          </a:p>
-          <a:p>
-            <a:pPr>
-              <a:spcAft>
-                <a:spcPts val="1300"/>
-              </a:spcAft>
-            </a:pPr>
-            <a:r>
-              <a:rPr sz="1600">
-                <a:solidFill>
-                  <a:srgbClr val="1F2A37"/>
-                </a:solidFill>
-                <a:latin typeface="Calibri"/>
-              </a:rPr>
-              <a:t>— Dry-run proves the merge produces a superset rather than a replacement.</a:t>
-            </a:r>
-          </a:p>
-          <a:p>
-            <a:pPr>
-              <a:spcAft>
-                <a:spcPts val="1300"/>
-              </a:spcAft>
-            </a:pPr>
-            <a:r>
-              <a:rPr sz="1600">
-                <a:solidFill>
-                  <a:srgbClr val="1F2A37"/>
-                </a:solidFill>
-                <a:latin typeface="Calibri"/>
-              </a:rPr>
-              <a:t>— Re-applying is safe — the app merges by term id/name, so links do not duplicate.</a:t>
-            </a:r>
-          </a:p>
-          <a:p>
-            <a:pPr>
-              <a:spcAft>
-                <a:spcPts val="1300"/>
-              </a:spcAft>
-            </a:pPr>
-            <a:r>
-              <a:rPr sz="1600">
-                <a:solidFill>
-                  <a:srgbClr val="1F2A37"/>
-                </a:solidFill>
-                <a:latin typeface="Calibri"/>
-              </a:rPr>
-              <a:t>— Base URL is the server ROOT and the VHOST — not an IP, not the Keycloak realm URL.</a:t>
+              <a:t>— Scope a FOLDER entity and PDC profiles it AND every file inside. Scope a FILE and you get that file only.</a:t>
+            </a:r>
+          </a:p>
+          <a:p>
+            <a:pPr>
+              <a:spcAft>
+                <a:spcPts val="1300"/>
+              </a:spcAft>
+            </a:pPr>
+            <a:r>
+              <a:rPr sz="1600">
+                <a:solidFill>
+                  <a:srgbClr val="1F2A37"/>
+                </a:solidFill>
+                <a:latin typeface="Calibri"/>
+              </a:rPr>
+              <a:t>— A Data-Elements payload carries ONE representative file per folder — so file scope profiles 5 of 16 and still returns SUCCESS.</a:t>
+            </a:r>
+          </a:p>
+          <a:p>
+            <a:pPr>
+              <a:spcAft>
+                <a:spcPts val="1300"/>
+              </a:spcAft>
+            </a:pPr>
+            <a:r>
+              <a:rPr sz="1600">
+                <a:solidFill>
+                  <a:srgbClr val="1F2A37"/>
+                </a:solidFill>
+                <a:latin typeface="Calibri"/>
+              </a:rPr>
+              <a:t>— Read the run message: 'awc-documents/compliance' (slashed) = folder, cascading. Dotted = the file fallback.</a:t>
+            </a:r>
+          </a:p>
+          <a:p>
+            <a:pPr>
+              <a:spcAft>
+                <a:spcPts val="1300"/>
+              </a:spcAft>
+            </a:pPr>
+            <a:r>
+              <a:rPr sz="1600">
+                <a:solidFill>
+                  <a:srgbClr val="1F2A37"/>
+                </a:solidFill>
+                <a:latin typeface="Calibri"/>
+              </a:rPr>
+              <a:t>— GOTCHA: PDC types object-store folders FOLDER, not DIRECTORY — a scan reports '16 FILE + 5 FOLDER entities'.</a:t>
+            </a:r>
+          </a:p>
+          <a:p>
+            <a:pPr>
+              <a:spcAft>
+                <a:spcPts val="1300"/>
+              </a:spcAft>
+            </a:pPr>
+            <a:r>
+              <a:rPr sz="1600">
+                <a:solidFill>
+                  <a:srgbClr val="1F2A37"/>
+                </a:solidFill>
+                <a:latin typeface="Calibri"/>
+              </a:rPr>
+              <a:t>— A filter that omits FOLDER gets no hits at all, and reads exactly like 'that folder is not catalogued'.</a:t>
             </a:r>
           </a:p>
         </p:txBody>
@@ -9353,7 +9372,7 @@
                   <a:srgbClr val="134E4A"/>
                 </a:solidFill>
               </a:rPr>
-              <a:t>Drift, Reconcile &amp; the Registry</a:t>
+              <a:t>Lab F · SKIPPED is not always a failure</a:t>
             </a:r>
           </a:p>
           <a:p>
@@ -9363,7 +9382,7 @@
                   <a:srgbClr val="0F766E"/>
                 </a:solidFill>
               </a:rPr>
-              <a:t>why drift is a post-reconcile idea</a:t>
+              <a:t>what Discovery can and cannot profile</a:t>
             </a:r>
           </a:p>
         </p:txBody>
@@ -9446,71 +9465,71 @@
                 </a:solidFill>
                 <a:latin typeface="Calibri"/>
               </a:rPr>
-              <a:t>— A dictionary method matches a concept by dictionaryTermId — which does not exist until PDC mints it at import.</a:t>
-            </a:r>
-          </a:p>
-          <a:p>
-            <a:pPr>
-              <a:spcAft>
-                <a:spcPts val="1300"/>
-              </a:spcAft>
-            </a:pPr>
-            <a:r>
-              <a:rPr sz="1600">
-                <a:solidFill>
-                  <a:srgbClr val="1F2A37"/>
-                </a:solidFill>
-                <a:latin typeface="Calibri"/>
-              </a:rPr>
-              <a:t>— scan → review → export → import (ids minted) → RECONCILE → emit methods → drift check.</a:t>
-            </a:r>
-          </a:p>
-          <a:p>
-            <a:pPr>
-              <a:spcAft>
-                <a:spcPts val="1300"/>
-              </a:spcAft>
-            </a:pPr>
-            <a:r>
-              <a:rPr sz="1600">
-                <a:solidFill>
-                  <a:srgbClr val="1F2A37"/>
-                </a:solidFill>
-                <a:latin typeface="Calibri"/>
-              </a:rPr>
-              <a:t>— Before reconcile, dictionary methods read UNKNOWN. Pattern methods bind by category name, so they show a step earlier.</a:t>
-            </a:r>
-          </a:p>
-          <a:p>
-            <a:pPr>
-              <a:spcAft>
-                <a:spcPts val="1300"/>
-              </a:spcAft>
-            </a:pPr>
-            <a:r>
-              <a:rPr sz="1600">
-                <a:solidFill>
-                  <a:srgbClr val="1F2A37"/>
-                </a:solidFill>
-                <a:latin typeface="Calibri"/>
-              </a:rPr>
-              <a:t>— The Registry is persistent state saved with the glossary — the reconcile handshake is stateful.</a:t>
-            </a:r>
-          </a:p>
-          <a:p>
-            <a:pPr>
-              <a:spcAft>
-                <a:spcPts val="1300"/>
-              </a:spcAft>
-            </a:pPr>
-            <a:r>
-              <a:rPr sz="1600">
-                <a:solidFill>
-                  <a:srgbClr val="1F2A37"/>
-                </a:solidFill>
-                <a:latin typeface="Calibri"/>
-              </a:rPr>
-              <a:t>— Sensitivity is rules-first: the model never sets a governed field, and the scan classifier is re-asserted after every run.</a:t>
+              <a:t>— csv / tsv / json / jsonl / txt  -&gt;  COMPLETED: columns with rows, cardinality, uniqueness, density, lengths.</a:t>
+            </a:r>
+          </a:p>
+          <a:p>
+            <a:pPr>
+              <a:spcAft>
+                <a:spcPts val="1300"/>
+              </a:spcAft>
+            </a:pPr>
+            <a:r>
+              <a:rPr sz="1600">
+                <a:solidFill>
+                  <a:srgbClr val="1F2A37"/>
+                </a:solidFill>
+                <a:latin typeface="Calibri"/>
+              </a:rPr>
+              <a:t>— pdf / docx  -&gt;  properties and checksum yes (pages, author, title); Profiled Status stays SKIPPED, permanently.</a:t>
+            </a:r>
+          </a:p>
+          <a:p>
+            <a:pPr>
+              <a:spcAft>
+                <a:spcPts val="1300"/>
+              </a:spcAft>
+            </a:pPr>
+            <a:r>
+              <a:rPr sz="1600">
+                <a:solidFill>
+                  <a:srgbClr val="1F2A37"/>
+                </a:solidFill>
+                <a:latin typeface="Calibri"/>
+              </a:rPr>
+              <a:t>— A PDF has no rows or columns to sample, so profiling is meaningless — neither PDC nor the app can score one.</a:t>
+            </a:r>
+          </a:p>
+          <a:p>
+            <a:pPr>
+              <a:spcAft>
+                <a:spcPts val="1300"/>
+              </a:spcAft>
+            </a:pPr>
+            <a:r>
+              <a:rPr sz="1600">
+                <a:solidFill>
+                  <a:srgbClr val="1F2A37"/>
+                </a:solidFill>
+                <a:latin typeface="Calibri"/>
+              </a:rPr>
+              <a:t>— Verify the cascade on a file that was NOT the representative. The representative only proves the scope;</a:t>
+            </a:r>
+          </a:p>
+          <a:p>
+            <a:pPr>
+              <a:spcAft>
+                <a:spcPts val="1300"/>
+              </a:spcAft>
+            </a:pPr>
+            <a:r>
+              <a:rPr sz="1600">
+                <a:solidFill>
+                  <a:srgbClr val="1F2A37"/>
+                </a:solidFill>
+                <a:latin typeface="Calibri"/>
+              </a:rPr>
+              <a:t>— and a PDF proves neither, because it can never profile.</a:t>
             </a:r>
           </a:p>
         </p:txBody>
@@ -9639,7 +9658,7 @@
                   <a:srgbClr val="134E4A"/>
                 </a:solidFill>
               </a:rPr>
-              <a:t>Safe enrichment</a:t>
+              <a:t>Alternative input · Harvest</a:t>
             </a:r>
           </a:p>
           <a:p>
@@ -9649,7 +9668,7 @@
                   <a:srgbClr val="0F766E"/>
                 </a:solidFill>
               </a:rPr>
-              <a:t>prose from the model, links from a map</a:t>
+              <a:t>when you cannot scan the source</a:t>
             </a:r>
           </a:p>
         </p:txBody>
@@ -9732,71 +9751,55 @@
                 </a:solidFill>
                 <a:latin typeface="Calibri"/>
               </a:rPr>
-              <a:t>— A small model will invent regulation names, section numbers and — worst — live URLs.</a:t>
-            </a:r>
-          </a:p>
-          <a:p>
-            <a:pPr>
-              <a:spcAft>
-                <a:spcPts val="1300"/>
-              </a:spcAft>
-            </a:pPr>
-            <a:r>
-              <a:rPr sz="1600">
-                <a:solidFill>
-                  <a:srgbClr val="1F2A37"/>
-                </a:solidFill>
-                <a:latin typeface="Calibri"/>
-              </a:rPr>
-              <a:t>— A governance term citing an invented regulation is worse than one citing nothing.</a:t>
-            </a:r>
-          </a:p>
-          <a:p>
-            <a:pPr>
-              <a:spcAft>
-                <a:spcPts val="1300"/>
-              </a:spcAft>
-            </a:pPr>
-            <a:r>
-              <a:rPr sz="1600">
-                <a:solidFill>
-                  <a:srgbClr val="1F2A37"/>
-                </a:solidFill>
-                <a:latin typeface="Calibri"/>
-              </a:rPr>
-              <a:t>— So the model writes one or two plain sentences and is told NOT to produce citations.</a:t>
-            </a:r>
-          </a:p>
-          <a:p>
-            <a:pPr>
-              <a:spcAft>
-                <a:spcPts val="1300"/>
-              </a:spcAft>
-            </a:pPr>
-            <a:r>
-              <a:rPr sz="1600">
-                <a:solidFill>
-                  <a:srgbClr val="1F2A37"/>
-                </a:solidFill>
-                <a:latin typeface="Calibri"/>
-              </a:rPr>
-              <a:t>— Links come only from a curated, human-verified reference map in the domain pack, each stamped with its verification date.</a:t>
-            </a:r>
-          </a:p>
-          <a:p>
-            <a:pPr>
-              <a:spcAft>
-                <a:spcPts val="1300"/>
-              </a:spcAft>
-            </a:pPr>
-            <a:r>
-              <a:rPr sz="1600">
-                <a:solidFill>
-                  <a:srgbClr val="1F2A37"/>
-                </a:solidFill>
-                <a:latin typeface="Calibri"/>
-              </a:rPr>
-              <a:t>— Same principle as the tag allow-list: the model proposes within a controlled vocabulary and never mints facts.</a:t>
+              <a:t>— Builds the glossary from what PDC already catalogued — no database connection, no password.</a:t>
+            </a:r>
+          </a:p>
+          <a:p>
+            <a:pPr>
+              <a:spcAft>
+                <a:spcPts val="1300"/>
+              </a:spcAft>
+            </a:pPr>
+            <a:r>
+              <a:rPr sz="1600">
+                <a:solidFill>
+                  <a:srgbClr val="1F2A37"/>
+                </a:solidFill>
+                <a:latin typeface="Calibri"/>
+              </a:rPr>
+              <a:t>— There is no list-all-data-sources call: the app discovers roots via entities/filter.</a:t>
+            </a:r>
+          </a:p>
+          <a:p>
+            <a:pPr>
+              <a:spcAft>
+                <a:spcPts val="1300"/>
+              </a:spcAft>
+            </a:pPr>
+            <a:r>
+              <a:rPr sz="1600">
+                <a:solidFill>
+                  <a:srgbClr val="1F2A37"/>
+                </a:solidFill>
+                <a:latin typeface="Calibri"/>
+              </a:rPr>
+              <a:t>— It reads dataType, keys, nullability, the steward's description, sensitivity and existing terms.</a:t>
+            </a:r>
+          </a:p>
+          <a:p>
+            <a:pPr>
+              <a:spcAft>
+                <a:spcPts val="1300"/>
+              </a:spcAft>
+            </a:pPr>
+            <a:r>
+              <a:rPr sz="1600">
+                <a:solidFill>
+                  <a:srgbClr val="1F2A37"/>
+                </a:solidFill>
+                <a:latin typeface="Calibri"/>
+              </a:rPr>
+              <a:t>— Columns PDC already governs are flagged, so the generator suggests but never silently overwrites.</a:t>
             </a:r>
           </a:p>
         </p:txBody>
@@ -9925,7 +9928,7 @@
                   <a:srgbClr val="134E4A"/>
                 </a:solidFill>
               </a:rPr>
-              <a:t>Build from the Term, match the tags</a:t>
+              <a:t>Before you point it at production</a:t>
             </a:r>
           </a:p>
           <a:p>
@@ -9935,7 +9938,7 @@
                   <a:srgbClr val="0F766E"/>
                 </a:solidFill>
               </a:rPr>
-              <a:t>the closing argument</a:t>
+              <a:t>the caveats that bite</a:t>
             </a:r>
           </a:p>
         </p:txBody>
@@ -10018,55 +10021,71 @@
                 </a:solidFill>
                 <a:latin typeface="Calibri"/>
               </a:rPr>
-              <a:t>— The Term is the canonical anchor: it has identity, links to the glossary, and carries a fixed governed tag set.</a:t>
-            </a:r>
-          </a:p>
-          <a:p>
-            <a:pPr>
-              <a:spcAft>
-                <a:spcPts val="1300"/>
-              </a:spcAft>
-            </a:pPr>
-            <a:r>
-              <a:rPr sz="1600">
-                <a:solidFill>
-                  <a:srgbClr val="1F2A37"/>
-                </a:solidFill>
-                <a:latin typeface="Calibri"/>
-              </a:rPr>
-              <a:t>— Tags are attributes of that term.</a:t>
-            </a:r>
-          </a:p>
-          <a:p>
-            <a:pPr>
-              <a:spcAft>
-                <a:spcPts val="1300"/>
-              </a:spcAft>
-            </a:pPr>
-            <a:r>
-              <a:rPr sz="1600">
-                <a:solidFill>
-                  <a:srgbClr val="1F2A37"/>
-                </a:solidFill>
-                <a:latin typeface="Calibri"/>
-              </a:rPr>
-              <a:t>— So authoring term-first — one method per concept, emitting that concept's tags — guarantees consistency.</a:t>
-            </a:r>
-          </a:p>
-          <a:p>
-            <a:pPr>
-              <a:spcAft>
-                <a:spcPts val="1300"/>
-              </a:spcAft>
-            </a:pPr>
-            <a:r>
-              <a:rPr sz="1600">
-                <a:solidFill>
-                  <a:srgbClr val="1F2A37"/>
-                </a:solidFill>
-                <a:latin typeface="Calibri"/>
-              </a:rPr>
-              <a:t>— Tag consistency is not a competing goal. It is a consequence of term-anchored authoring.</a:t>
+              <a:t>— Least privilege — glossary read, entity edit, job execute. Business Steward beats admin.</a:t>
+            </a:r>
+          </a:p>
+          <a:p>
+            <a:pPr>
+              <a:spcAft>
+                <a:spcPts val="1300"/>
+              </a:spcAft>
+            </a:pPr>
+            <a:r>
+              <a:rPr sz="1600">
+                <a:solidFill>
+                  <a:srgbClr val="1F2A37"/>
+                </a:solidFill>
+                <a:latin typeface="Calibri"/>
+              </a:rPr>
+              <a:t>— Confirm the path version against YOUR instance's Swagger; the jobs catalog is richest in v3.</a:t>
+            </a:r>
+          </a:p>
+          <a:p>
+            <a:pPr>
+              <a:spcAft>
+                <a:spcPts val="1300"/>
+              </a:spcAft>
+            </a:pPr>
+            <a:r>
+              <a:rPr sz="1600">
+                <a:solidFill>
+                  <a:srgbClr val="1F2A37"/>
+                </a:solidFill>
+                <a:latin typeface="Calibri"/>
+              </a:rPr>
+              <a:t>— Dry-run proves the merge produces a superset rather than a replacement.</a:t>
+            </a:r>
+          </a:p>
+          <a:p>
+            <a:pPr>
+              <a:spcAft>
+                <a:spcPts val="1300"/>
+              </a:spcAft>
+            </a:pPr>
+            <a:r>
+              <a:rPr sz="1600">
+                <a:solidFill>
+                  <a:srgbClr val="1F2A37"/>
+                </a:solidFill>
+                <a:latin typeface="Calibri"/>
+              </a:rPr>
+              <a:t>— Re-applying is safe — the app merges by term id/name, so links do not duplicate.</a:t>
+            </a:r>
+          </a:p>
+          <a:p>
+            <a:pPr>
+              <a:spcAft>
+                <a:spcPts val="1300"/>
+              </a:spcAft>
+            </a:pPr>
+            <a:r>
+              <a:rPr sz="1600">
+                <a:solidFill>
+                  <a:srgbClr val="1F2A37"/>
+                </a:solidFill>
+                <a:latin typeface="Calibri"/>
+              </a:rPr>
+              <a:t>— Base URL is the server ROOT and the VHOST — not an IP, not the Keycloak realm URL.</a:t>
             </a:r>
           </a:p>
         </p:txBody>
@@ -10132,6 +10151,848 @@
         <p:spPr>
           <a:xfrm>
             <a:off x="0" y="0"/>
+            <a:ext cx="12191695" cy="128016"/>
+          </a:xfrm>
+          <a:prstGeom prst="rect">
+            <a:avLst/>
+          </a:prstGeom>
+          <a:solidFill>
+            <a:srgbClr val="0F766E"/>
+          </a:solidFill>
+          <a:ln>
+            <a:noFill/>
+          </a:ln>
+          <a:effectLst/>
+        </p:spPr>
+        <p:style>
+          <a:lnRef idx="1">
+            <a:schemeClr val="accent1"/>
+          </a:lnRef>
+          <a:fillRef idx="3">
+            <a:schemeClr val="accent1"/>
+          </a:fillRef>
+          <a:effectRef idx="2">
+            <a:schemeClr val="accent1"/>
+          </a:effectRef>
+          <a:fontRef idx="minor">
+            <a:schemeClr val="lt1"/>
+          </a:fontRef>
+        </p:style>
+        <p:txBody>
+          <a:bodyPr rtlCol="0" anchor="ctr"/>
+          <a:lstStyle/>
+          <a:p>
+            <a:pPr algn="ctr"/>
+          </a:p>
+        </p:txBody>
+      </p:sp>
+      <p:sp>
+        <p:nvSpPr>
+          <p:cNvPr id="3" name="TextBox 2"/>
+          <p:cNvSpPr txBox="1"/>
+          <p:nvPr/>
+        </p:nvSpPr>
+        <p:spPr>
+          <a:xfrm>
+            <a:off x="777240" y="502920"/>
+            <a:ext cx="10637215" cy="1005840"/>
+          </a:xfrm>
+          <a:prstGeom prst="rect">
+            <a:avLst/>
+          </a:prstGeom>
+          <a:noFill/>
+        </p:spPr>
+        <p:txBody>
+          <a:bodyPr wrap="square">
+            <a:spAutoFit/>
+          </a:bodyPr>
+          <a:lstStyle/>
+          <a:p>
+            <a:r>
+              <a:rPr sz="3000" b="1">
+                <a:solidFill>
+                  <a:srgbClr val="134E4A"/>
+                </a:solidFill>
+              </a:rPr>
+              <a:t>Drift, Reconcile &amp; the Registry</a:t>
+            </a:r>
+          </a:p>
+          <a:p>
+            <a:r>
+              <a:rPr sz="1500" i="1">
+                <a:solidFill>
+                  <a:srgbClr val="0F766E"/>
+                </a:solidFill>
+              </a:rPr>
+              <a:t>why drift is a post-reconcile idea</a:t>
+            </a:r>
+          </a:p>
+        </p:txBody>
+      </p:sp>
+      <p:sp>
+        <p:nvSpPr>
+          <p:cNvPr id="4" name="Rectangle 3"/>
+          <p:cNvSpPr/>
+          <p:nvPr/>
+        </p:nvSpPr>
+        <p:spPr>
+          <a:xfrm>
+            <a:off x="777240" y="1755648"/>
+            <a:ext cx="10637215" cy="15240"/>
+          </a:xfrm>
+          <a:prstGeom prst="rect">
+            <a:avLst/>
+          </a:prstGeom>
+          <a:solidFill>
+            <a:srgbClr val="E5E7EB"/>
+          </a:solidFill>
+          <a:ln>
+            <a:noFill/>
+          </a:ln>
+          <a:effectLst/>
+        </p:spPr>
+        <p:style>
+          <a:lnRef idx="1">
+            <a:schemeClr val="accent1"/>
+          </a:lnRef>
+          <a:fillRef idx="3">
+            <a:schemeClr val="accent1"/>
+          </a:fillRef>
+          <a:effectRef idx="2">
+            <a:schemeClr val="accent1"/>
+          </a:effectRef>
+          <a:fontRef idx="minor">
+            <a:schemeClr val="lt1"/>
+          </a:fontRef>
+        </p:style>
+        <p:txBody>
+          <a:bodyPr rtlCol="0" anchor="ctr"/>
+          <a:lstStyle/>
+          <a:p>
+            <a:pPr algn="ctr"/>
+          </a:p>
+        </p:txBody>
+      </p:sp>
+      <p:sp>
+        <p:nvSpPr>
+          <p:cNvPr id="5" name="TextBox 4"/>
+          <p:cNvSpPr txBox="1"/>
+          <p:nvPr/>
+        </p:nvSpPr>
+        <p:spPr>
+          <a:xfrm>
+            <a:off x="777240" y="1965960"/>
+            <a:ext cx="10637215" cy="4206240"/>
+          </a:xfrm>
+          <a:prstGeom prst="rect">
+            <a:avLst/>
+          </a:prstGeom>
+          <a:noFill/>
+        </p:spPr>
+        <p:txBody>
+          <a:bodyPr wrap="square">
+            <a:spAutoFit/>
+          </a:bodyPr>
+          <a:lstStyle/>
+          <a:p>
+            <a:pPr>
+              <a:spcAft>
+                <a:spcPts val="1300"/>
+              </a:spcAft>
+            </a:pPr>
+            <a:r>
+              <a:rPr sz="1600">
+                <a:solidFill>
+                  <a:srgbClr val="1F2A37"/>
+                </a:solidFill>
+                <a:latin typeface="Calibri"/>
+              </a:rPr>
+              <a:t>— A dictionary method matches a concept by dictionaryTermId — which does not exist until PDC mints it at import.</a:t>
+            </a:r>
+          </a:p>
+          <a:p>
+            <a:pPr>
+              <a:spcAft>
+                <a:spcPts val="1300"/>
+              </a:spcAft>
+            </a:pPr>
+            <a:r>
+              <a:rPr sz="1600">
+                <a:solidFill>
+                  <a:srgbClr val="1F2A37"/>
+                </a:solidFill>
+                <a:latin typeface="Calibri"/>
+              </a:rPr>
+              <a:t>— scan → review → export → import (ids minted) → RECONCILE → emit methods → drift check.</a:t>
+            </a:r>
+          </a:p>
+          <a:p>
+            <a:pPr>
+              <a:spcAft>
+                <a:spcPts val="1300"/>
+              </a:spcAft>
+            </a:pPr>
+            <a:r>
+              <a:rPr sz="1600">
+                <a:solidFill>
+                  <a:srgbClr val="1F2A37"/>
+                </a:solidFill>
+                <a:latin typeface="Calibri"/>
+              </a:rPr>
+              <a:t>— Before reconcile, dictionary methods read UNKNOWN. Pattern methods bind by category name, so they show a step earlier.</a:t>
+            </a:r>
+          </a:p>
+          <a:p>
+            <a:pPr>
+              <a:spcAft>
+                <a:spcPts val="1300"/>
+              </a:spcAft>
+            </a:pPr>
+            <a:r>
+              <a:rPr sz="1600">
+                <a:solidFill>
+                  <a:srgbClr val="1F2A37"/>
+                </a:solidFill>
+                <a:latin typeface="Calibri"/>
+              </a:rPr>
+              <a:t>— The Registry is persistent state saved with the glossary — the reconcile handshake is stateful.</a:t>
+            </a:r>
+          </a:p>
+          <a:p>
+            <a:pPr>
+              <a:spcAft>
+                <a:spcPts val="1300"/>
+              </a:spcAft>
+            </a:pPr>
+            <a:r>
+              <a:rPr sz="1600">
+                <a:solidFill>
+                  <a:srgbClr val="1F2A37"/>
+                </a:solidFill>
+                <a:latin typeface="Calibri"/>
+              </a:rPr>
+              <a:t>— Sensitivity is rules-first: the model never sets a governed field, and the scan classifier is re-asserted after every run.</a:t>
+            </a:r>
+          </a:p>
+        </p:txBody>
+      </p:sp>
+      <p:sp>
+        <p:nvSpPr>
+          <p:cNvPr id="6" name="TextBox 5"/>
+          <p:cNvSpPr txBox="1"/>
+          <p:nvPr/>
+        </p:nvSpPr>
+        <p:spPr>
+          <a:xfrm>
+            <a:off x="11002975" y="6291072"/>
+            <a:ext cx="731520" cy="320040"/>
+          </a:xfrm>
+          <a:prstGeom prst="rect">
+            <a:avLst/>
+          </a:prstGeom>
+          <a:noFill/>
+        </p:spPr>
+        <p:txBody>
+          <a:bodyPr wrap="square">
+            <a:spAutoFit/>
+          </a:bodyPr>
+          <a:lstStyle/>
+          <a:p>
+            <a:pPr algn="r"/>
+            <a:r>
+              <a:rPr sz="1100">
+                <a:solidFill>
+                  <a:srgbClr val="6B7280"/>
+                </a:solidFill>
+              </a:rPr>
+              <a:t>33</a:t>
+            </a:r>
+          </a:p>
+        </p:txBody>
+      </p:sp>
+    </p:spTree>
+  </p:cSld>
+  <p:clrMapOvr>
+    <a:masterClrMapping/>
+  </p:clrMapOvr>
+</p:sld>
+</file>
+
+<file path=ppt/slides/slide34.xml><?xml version="1.0" encoding="utf-8"?>
+<p:sld xmlns:a="http://schemas.openxmlformats.org/drawingml/2006/main" xmlns:p="http://schemas.openxmlformats.org/presentationml/2006/main" xmlns:r="http://schemas.openxmlformats.org/officeDocument/2006/relationships">
+  <p:cSld>
+    <p:spTree>
+      <p:nvGrpSpPr>
+        <p:cNvPr id="1" name=""/>
+        <p:cNvGrpSpPr/>
+        <p:nvPr/>
+      </p:nvGrpSpPr>
+      <p:grpSpPr/>
+      <p:sp>
+        <p:nvSpPr>
+          <p:cNvPr id="2" name="Rectangle 1"/>
+          <p:cNvSpPr/>
+          <p:nvPr/>
+        </p:nvSpPr>
+        <p:spPr>
+          <a:xfrm>
+            <a:off x="0" y="0"/>
+            <a:ext cx="12191695" cy="128016"/>
+          </a:xfrm>
+          <a:prstGeom prst="rect">
+            <a:avLst/>
+          </a:prstGeom>
+          <a:solidFill>
+            <a:srgbClr val="0F766E"/>
+          </a:solidFill>
+          <a:ln>
+            <a:noFill/>
+          </a:ln>
+          <a:effectLst/>
+        </p:spPr>
+        <p:style>
+          <a:lnRef idx="1">
+            <a:schemeClr val="accent1"/>
+          </a:lnRef>
+          <a:fillRef idx="3">
+            <a:schemeClr val="accent1"/>
+          </a:fillRef>
+          <a:effectRef idx="2">
+            <a:schemeClr val="accent1"/>
+          </a:effectRef>
+          <a:fontRef idx="minor">
+            <a:schemeClr val="lt1"/>
+          </a:fontRef>
+        </p:style>
+        <p:txBody>
+          <a:bodyPr rtlCol="0" anchor="ctr"/>
+          <a:lstStyle/>
+          <a:p>
+            <a:pPr algn="ctr"/>
+          </a:p>
+        </p:txBody>
+      </p:sp>
+      <p:sp>
+        <p:nvSpPr>
+          <p:cNvPr id="3" name="TextBox 2"/>
+          <p:cNvSpPr txBox="1"/>
+          <p:nvPr/>
+        </p:nvSpPr>
+        <p:spPr>
+          <a:xfrm>
+            <a:off x="777240" y="502920"/>
+            <a:ext cx="10637215" cy="1005840"/>
+          </a:xfrm>
+          <a:prstGeom prst="rect">
+            <a:avLst/>
+          </a:prstGeom>
+          <a:noFill/>
+        </p:spPr>
+        <p:txBody>
+          <a:bodyPr wrap="square">
+            <a:spAutoFit/>
+          </a:bodyPr>
+          <a:lstStyle/>
+          <a:p>
+            <a:r>
+              <a:rPr sz="3000" b="1">
+                <a:solidFill>
+                  <a:srgbClr val="134E4A"/>
+                </a:solidFill>
+              </a:rPr>
+              <a:t>Safe enrichment</a:t>
+            </a:r>
+          </a:p>
+          <a:p>
+            <a:r>
+              <a:rPr sz="1500" i="1">
+                <a:solidFill>
+                  <a:srgbClr val="0F766E"/>
+                </a:solidFill>
+              </a:rPr>
+              <a:t>prose from the model, links from a map</a:t>
+            </a:r>
+          </a:p>
+        </p:txBody>
+      </p:sp>
+      <p:sp>
+        <p:nvSpPr>
+          <p:cNvPr id="4" name="Rectangle 3"/>
+          <p:cNvSpPr/>
+          <p:nvPr/>
+        </p:nvSpPr>
+        <p:spPr>
+          <a:xfrm>
+            <a:off x="777240" y="1755648"/>
+            <a:ext cx="10637215" cy="15240"/>
+          </a:xfrm>
+          <a:prstGeom prst="rect">
+            <a:avLst/>
+          </a:prstGeom>
+          <a:solidFill>
+            <a:srgbClr val="E5E7EB"/>
+          </a:solidFill>
+          <a:ln>
+            <a:noFill/>
+          </a:ln>
+          <a:effectLst/>
+        </p:spPr>
+        <p:style>
+          <a:lnRef idx="1">
+            <a:schemeClr val="accent1"/>
+          </a:lnRef>
+          <a:fillRef idx="3">
+            <a:schemeClr val="accent1"/>
+          </a:fillRef>
+          <a:effectRef idx="2">
+            <a:schemeClr val="accent1"/>
+          </a:effectRef>
+          <a:fontRef idx="minor">
+            <a:schemeClr val="lt1"/>
+          </a:fontRef>
+        </p:style>
+        <p:txBody>
+          <a:bodyPr rtlCol="0" anchor="ctr"/>
+          <a:lstStyle/>
+          <a:p>
+            <a:pPr algn="ctr"/>
+          </a:p>
+        </p:txBody>
+      </p:sp>
+      <p:sp>
+        <p:nvSpPr>
+          <p:cNvPr id="5" name="TextBox 4"/>
+          <p:cNvSpPr txBox="1"/>
+          <p:nvPr/>
+        </p:nvSpPr>
+        <p:spPr>
+          <a:xfrm>
+            <a:off x="777240" y="1965960"/>
+            <a:ext cx="10637215" cy="4206240"/>
+          </a:xfrm>
+          <a:prstGeom prst="rect">
+            <a:avLst/>
+          </a:prstGeom>
+          <a:noFill/>
+        </p:spPr>
+        <p:txBody>
+          <a:bodyPr wrap="square">
+            <a:spAutoFit/>
+          </a:bodyPr>
+          <a:lstStyle/>
+          <a:p>
+            <a:pPr>
+              <a:spcAft>
+                <a:spcPts val="1300"/>
+              </a:spcAft>
+            </a:pPr>
+            <a:r>
+              <a:rPr sz="1600">
+                <a:solidFill>
+                  <a:srgbClr val="1F2A37"/>
+                </a:solidFill>
+                <a:latin typeface="Calibri"/>
+              </a:rPr>
+              <a:t>— A small model will invent regulation names, section numbers and — worst — live URLs.</a:t>
+            </a:r>
+          </a:p>
+          <a:p>
+            <a:pPr>
+              <a:spcAft>
+                <a:spcPts val="1300"/>
+              </a:spcAft>
+            </a:pPr>
+            <a:r>
+              <a:rPr sz="1600">
+                <a:solidFill>
+                  <a:srgbClr val="1F2A37"/>
+                </a:solidFill>
+                <a:latin typeface="Calibri"/>
+              </a:rPr>
+              <a:t>— A governance term citing an invented regulation is worse than one citing nothing.</a:t>
+            </a:r>
+          </a:p>
+          <a:p>
+            <a:pPr>
+              <a:spcAft>
+                <a:spcPts val="1300"/>
+              </a:spcAft>
+            </a:pPr>
+            <a:r>
+              <a:rPr sz="1600">
+                <a:solidFill>
+                  <a:srgbClr val="1F2A37"/>
+                </a:solidFill>
+                <a:latin typeface="Calibri"/>
+              </a:rPr>
+              <a:t>— So the model writes one or two plain sentences and is told NOT to produce citations.</a:t>
+            </a:r>
+          </a:p>
+          <a:p>
+            <a:pPr>
+              <a:spcAft>
+                <a:spcPts val="1300"/>
+              </a:spcAft>
+            </a:pPr>
+            <a:r>
+              <a:rPr sz="1600">
+                <a:solidFill>
+                  <a:srgbClr val="1F2A37"/>
+                </a:solidFill>
+                <a:latin typeface="Calibri"/>
+              </a:rPr>
+              <a:t>— Links come only from a curated, human-verified reference map in the domain pack, each stamped with its verification date.</a:t>
+            </a:r>
+          </a:p>
+          <a:p>
+            <a:pPr>
+              <a:spcAft>
+                <a:spcPts val="1300"/>
+              </a:spcAft>
+            </a:pPr>
+            <a:r>
+              <a:rPr sz="1600">
+                <a:solidFill>
+                  <a:srgbClr val="1F2A37"/>
+                </a:solidFill>
+                <a:latin typeface="Calibri"/>
+              </a:rPr>
+              <a:t>— Same principle as the tag allow-list: the model proposes within a controlled vocabulary and never mints facts.</a:t>
+            </a:r>
+          </a:p>
+        </p:txBody>
+      </p:sp>
+      <p:sp>
+        <p:nvSpPr>
+          <p:cNvPr id="6" name="TextBox 5"/>
+          <p:cNvSpPr txBox="1"/>
+          <p:nvPr/>
+        </p:nvSpPr>
+        <p:spPr>
+          <a:xfrm>
+            <a:off x="11002975" y="6291072"/>
+            <a:ext cx="731520" cy="320040"/>
+          </a:xfrm>
+          <a:prstGeom prst="rect">
+            <a:avLst/>
+          </a:prstGeom>
+          <a:noFill/>
+        </p:spPr>
+        <p:txBody>
+          <a:bodyPr wrap="square">
+            <a:spAutoFit/>
+          </a:bodyPr>
+          <a:lstStyle/>
+          <a:p>
+            <a:pPr algn="r"/>
+            <a:r>
+              <a:rPr sz="1100">
+                <a:solidFill>
+                  <a:srgbClr val="6B7280"/>
+                </a:solidFill>
+              </a:rPr>
+              <a:t>34</a:t>
+            </a:r>
+          </a:p>
+        </p:txBody>
+      </p:sp>
+    </p:spTree>
+  </p:cSld>
+  <p:clrMapOvr>
+    <a:masterClrMapping/>
+  </p:clrMapOvr>
+</p:sld>
+</file>
+
+<file path=ppt/slides/slide35.xml><?xml version="1.0" encoding="utf-8"?>
+<p:sld xmlns:a="http://schemas.openxmlformats.org/drawingml/2006/main" xmlns:p="http://schemas.openxmlformats.org/presentationml/2006/main" xmlns:r="http://schemas.openxmlformats.org/officeDocument/2006/relationships">
+  <p:cSld>
+    <p:spTree>
+      <p:nvGrpSpPr>
+        <p:cNvPr id="1" name=""/>
+        <p:cNvGrpSpPr/>
+        <p:nvPr/>
+      </p:nvGrpSpPr>
+      <p:grpSpPr/>
+      <p:sp>
+        <p:nvSpPr>
+          <p:cNvPr id="2" name="Rectangle 1"/>
+          <p:cNvSpPr/>
+          <p:nvPr/>
+        </p:nvSpPr>
+        <p:spPr>
+          <a:xfrm>
+            <a:off x="0" y="0"/>
+            <a:ext cx="12191695" cy="128016"/>
+          </a:xfrm>
+          <a:prstGeom prst="rect">
+            <a:avLst/>
+          </a:prstGeom>
+          <a:solidFill>
+            <a:srgbClr val="0F766E"/>
+          </a:solidFill>
+          <a:ln>
+            <a:noFill/>
+          </a:ln>
+          <a:effectLst/>
+        </p:spPr>
+        <p:style>
+          <a:lnRef idx="1">
+            <a:schemeClr val="accent1"/>
+          </a:lnRef>
+          <a:fillRef idx="3">
+            <a:schemeClr val="accent1"/>
+          </a:fillRef>
+          <a:effectRef idx="2">
+            <a:schemeClr val="accent1"/>
+          </a:effectRef>
+          <a:fontRef idx="minor">
+            <a:schemeClr val="lt1"/>
+          </a:fontRef>
+        </p:style>
+        <p:txBody>
+          <a:bodyPr rtlCol="0" anchor="ctr"/>
+          <a:lstStyle/>
+          <a:p>
+            <a:pPr algn="ctr"/>
+          </a:p>
+        </p:txBody>
+      </p:sp>
+      <p:sp>
+        <p:nvSpPr>
+          <p:cNvPr id="3" name="TextBox 2"/>
+          <p:cNvSpPr txBox="1"/>
+          <p:nvPr/>
+        </p:nvSpPr>
+        <p:spPr>
+          <a:xfrm>
+            <a:off x="777240" y="502920"/>
+            <a:ext cx="10637215" cy="1005840"/>
+          </a:xfrm>
+          <a:prstGeom prst="rect">
+            <a:avLst/>
+          </a:prstGeom>
+          <a:noFill/>
+        </p:spPr>
+        <p:txBody>
+          <a:bodyPr wrap="square">
+            <a:spAutoFit/>
+          </a:bodyPr>
+          <a:lstStyle/>
+          <a:p>
+            <a:r>
+              <a:rPr sz="3000" b="1">
+                <a:solidFill>
+                  <a:srgbClr val="134E4A"/>
+                </a:solidFill>
+              </a:rPr>
+              <a:t>Build from the Term, match the tags</a:t>
+            </a:r>
+          </a:p>
+          <a:p>
+            <a:r>
+              <a:rPr sz="1500" i="1">
+                <a:solidFill>
+                  <a:srgbClr val="0F766E"/>
+                </a:solidFill>
+              </a:rPr>
+              <a:t>the closing argument</a:t>
+            </a:r>
+          </a:p>
+        </p:txBody>
+      </p:sp>
+      <p:sp>
+        <p:nvSpPr>
+          <p:cNvPr id="4" name="Rectangle 3"/>
+          <p:cNvSpPr/>
+          <p:nvPr/>
+        </p:nvSpPr>
+        <p:spPr>
+          <a:xfrm>
+            <a:off x="777240" y="1755648"/>
+            <a:ext cx="10637215" cy="15240"/>
+          </a:xfrm>
+          <a:prstGeom prst="rect">
+            <a:avLst/>
+          </a:prstGeom>
+          <a:solidFill>
+            <a:srgbClr val="E5E7EB"/>
+          </a:solidFill>
+          <a:ln>
+            <a:noFill/>
+          </a:ln>
+          <a:effectLst/>
+        </p:spPr>
+        <p:style>
+          <a:lnRef idx="1">
+            <a:schemeClr val="accent1"/>
+          </a:lnRef>
+          <a:fillRef idx="3">
+            <a:schemeClr val="accent1"/>
+          </a:fillRef>
+          <a:effectRef idx="2">
+            <a:schemeClr val="accent1"/>
+          </a:effectRef>
+          <a:fontRef idx="minor">
+            <a:schemeClr val="lt1"/>
+          </a:fontRef>
+        </p:style>
+        <p:txBody>
+          <a:bodyPr rtlCol="0" anchor="ctr"/>
+          <a:lstStyle/>
+          <a:p>
+            <a:pPr algn="ctr"/>
+          </a:p>
+        </p:txBody>
+      </p:sp>
+      <p:sp>
+        <p:nvSpPr>
+          <p:cNvPr id="5" name="TextBox 4"/>
+          <p:cNvSpPr txBox="1"/>
+          <p:nvPr/>
+        </p:nvSpPr>
+        <p:spPr>
+          <a:xfrm>
+            <a:off x="777240" y="1965960"/>
+            <a:ext cx="10637215" cy="4206240"/>
+          </a:xfrm>
+          <a:prstGeom prst="rect">
+            <a:avLst/>
+          </a:prstGeom>
+          <a:noFill/>
+        </p:spPr>
+        <p:txBody>
+          <a:bodyPr wrap="square">
+            <a:spAutoFit/>
+          </a:bodyPr>
+          <a:lstStyle/>
+          <a:p>
+            <a:pPr>
+              <a:spcAft>
+                <a:spcPts val="1300"/>
+              </a:spcAft>
+            </a:pPr>
+            <a:r>
+              <a:rPr sz="1600">
+                <a:solidFill>
+                  <a:srgbClr val="1F2A37"/>
+                </a:solidFill>
+                <a:latin typeface="Calibri"/>
+              </a:rPr>
+              <a:t>— The Term is the canonical anchor: it has identity, links to the glossary, and carries a fixed governed tag set.</a:t>
+            </a:r>
+          </a:p>
+          <a:p>
+            <a:pPr>
+              <a:spcAft>
+                <a:spcPts val="1300"/>
+              </a:spcAft>
+            </a:pPr>
+            <a:r>
+              <a:rPr sz="1600">
+                <a:solidFill>
+                  <a:srgbClr val="1F2A37"/>
+                </a:solidFill>
+                <a:latin typeface="Calibri"/>
+              </a:rPr>
+              <a:t>— Tags are attributes of that term.</a:t>
+            </a:r>
+          </a:p>
+          <a:p>
+            <a:pPr>
+              <a:spcAft>
+                <a:spcPts val="1300"/>
+              </a:spcAft>
+            </a:pPr>
+            <a:r>
+              <a:rPr sz="1600">
+                <a:solidFill>
+                  <a:srgbClr val="1F2A37"/>
+                </a:solidFill>
+                <a:latin typeface="Calibri"/>
+              </a:rPr>
+              <a:t>— So authoring term-first — one method per concept, emitting that concept's tags — guarantees consistency.</a:t>
+            </a:r>
+          </a:p>
+          <a:p>
+            <a:pPr>
+              <a:spcAft>
+                <a:spcPts val="1300"/>
+              </a:spcAft>
+            </a:pPr>
+            <a:r>
+              <a:rPr sz="1600">
+                <a:solidFill>
+                  <a:srgbClr val="1F2A37"/>
+                </a:solidFill>
+                <a:latin typeface="Calibri"/>
+              </a:rPr>
+              <a:t>— Tag consistency is not a competing goal. It is a consequence of term-anchored authoring.</a:t>
+            </a:r>
+          </a:p>
+        </p:txBody>
+      </p:sp>
+      <p:sp>
+        <p:nvSpPr>
+          <p:cNvPr id="6" name="TextBox 5"/>
+          <p:cNvSpPr txBox="1"/>
+          <p:nvPr/>
+        </p:nvSpPr>
+        <p:spPr>
+          <a:xfrm>
+            <a:off x="11002975" y="6291072"/>
+            <a:ext cx="731520" cy="320040"/>
+          </a:xfrm>
+          <a:prstGeom prst="rect">
+            <a:avLst/>
+          </a:prstGeom>
+          <a:noFill/>
+        </p:spPr>
+        <p:txBody>
+          <a:bodyPr wrap="square">
+            <a:spAutoFit/>
+          </a:bodyPr>
+          <a:lstStyle/>
+          <a:p>
+            <a:pPr algn="r"/>
+            <a:r>
+              <a:rPr sz="1100">
+                <a:solidFill>
+                  <a:srgbClr val="6B7280"/>
+                </a:solidFill>
+              </a:rPr>
+              <a:t>35</a:t>
+            </a:r>
+          </a:p>
+        </p:txBody>
+      </p:sp>
+    </p:spTree>
+  </p:cSld>
+  <p:clrMapOvr>
+    <a:masterClrMapping/>
+  </p:clrMapOvr>
+</p:sld>
+</file>
+
+<file path=ppt/slides/slide36.xml><?xml version="1.0" encoding="utf-8"?>
+<p:sld xmlns:a="http://schemas.openxmlformats.org/drawingml/2006/main" xmlns:p="http://schemas.openxmlformats.org/presentationml/2006/main" xmlns:r="http://schemas.openxmlformats.org/officeDocument/2006/relationships">
+  <p:cSld>
+    <p:spTree>
+      <p:nvGrpSpPr>
+        <p:cNvPr id="1" name=""/>
+        <p:cNvGrpSpPr/>
+        <p:nvPr/>
+      </p:nvGrpSpPr>
+      <p:grpSpPr/>
+      <p:sp>
+        <p:nvSpPr>
+          <p:cNvPr id="2" name="Rectangle 1"/>
+          <p:cNvSpPr/>
+          <p:nvPr/>
+        </p:nvSpPr>
+        <p:spPr>
+          <a:xfrm>
+            <a:off x="0" y="0"/>
             <a:ext cx="12191695" cy="6858000"/>
           </a:xfrm>
           <a:prstGeom prst="rect">
@@ -10235,7 +11096,7 @@
                   <a:srgbClr val="6B7280"/>
                 </a:solidFill>
               </a:rPr>
-              <a:t>Glossary Generator 1.17.1</a:t>
+              <a:t>Glossary Generator 1.24.0</a:t>
             </a:r>
           </a:p>
         </p:txBody>
